--- a/public/lessons/year-6-maths/spring/week-15/multiply-decimals-by-whole-numbers/teaching-powerpoint-v1.pptx
+++ b/public/lessons/year-6-maths/spring/week-15/multiply-decimals-by-whole-numbers/teaching-powerpoint-v1.pptx
@@ -2,24 +2,24 @@
 <file path=ppt/presentation.xml><?xml version="1.0" encoding="utf-8"?>
 <p:presentation xmlns:p="http://schemas.openxmlformats.org/presentationml/2006/main">
   <p:sldMasterIdLst>
-    <p:sldMasterId xmlns:r="http://schemas.openxmlformats.org/officeDocument/2006/relationships" id="2147483648" r:id="R3ea33f46b2574217"/>
+    <p:sldMasterId xmlns:r="http://schemas.openxmlformats.org/officeDocument/2006/relationships" id="2147483648" r:id="R3b68bf92c0fc40bf"/>
   </p:sldMasterIdLst>
   <p:notesMasterIdLst>
-    <p:notesMasterId xmlns:r="http://schemas.openxmlformats.org/officeDocument/2006/relationships" r:id="R921c2bcbdeca4f98"/>
+    <p:notesMasterId xmlns:r="http://schemas.openxmlformats.org/officeDocument/2006/relationships" r:id="R4887cca8a37a410e"/>
   </p:notesMasterIdLst>
   <p:sldIdLst>
-    <p:sldId xmlns:r="http://schemas.openxmlformats.org/officeDocument/2006/relationships" id="256" r:id="R1d9d9d34249543cd"/>
-    <p:sldId xmlns:r="http://schemas.openxmlformats.org/officeDocument/2006/relationships" id="257" r:id="R789eaee22e48402e"/>
-    <p:sldId xmlns:r="http://schemas.openxmlformats.org/officeDocument/2006/relationships" id="258" r:id="R2ecd38cf359e4dc1"/>
-    <p:sldId xmlns:r="http://schemas.openxmlformats.org/officeDocument/2006/relationships" id="259" r:id="R1c4990a6621b4e67"/>
-    <p:sldId xmlns:r="http://schemas.openxmlformats.org/officeDocument/2006/relationships" id="260" r:id="R5193c68293cf4dcf"/>
-    <p:sldId xmlns:r="http://schemas.openxmlformats.org/officeDocument/2006/relationships" id="261" r:id="R0cf985cb32bb435a"/>
-    <p:sldId xmlns:r="http://schemas.openxmlformats.org/officeDocument/2006/relationships" id="262" r:id="R3a1afb80a61f44a4"/>
-    <p:sldId xmlns:r="http://schemas.openxmlformats.org/officeDocument/2006/relationships" id="263" r:id="Racf282a6d5d44d09"/>
-    <p:sldId xmlns:r="http://schemas.openxmlformats.org/officeDocument/2006/relationships" id="264" r:id="Raf774a6e93fd4471"/>
-    <p:sldId xmlns:r="http://schemas.openxmlformats.org/officeDocument/2006/relationships" id="265" r:id="R4bc14f4b79404ad7"/>
-    <p:sldId xmlns:r="http://schemas.openxmlformats.org/officeDocument/2006/relationships" id="266" r:id="Ra2504fc655df484a"/>
-    <p:sldId xmlns:r="http://schemas.openxmlformats.org/officeDocument/2006/relationships" id="267" r:id="Rf5603f7734cc485b"/>
+    <p:sldId xmlns:r="http://schemas.openxmlformats.org/officeDocument/2006/relationships" id="256" r:id="R4aa6a59c721e43ce"/>
+    <p:sldId xmlns:r="http://schemas.openxmlformats.org/officeDocument/2006/relationships" id="257" r:id="R347b23ebe4aa4885"/>
+    <p:sldId xmlns:r="http://schemas.openxmlformats.org/officeDocument/2006/relationships" id="258" r:id="Ref22ea01e3f54084"/>
+    <p:sldId xmlns:r="http://schemas.openxmlformats.org/officeDocument/2006/relationships" id="259" r:id="Rac848528d24d4708"/>
+    <p:sldId xmlns:r="http://schemas.openxmlformats.org/officeDocument/2006/relationships" id="260" r:id="R5bb7c1ad77534d49"/>
+    <p:sldId xmlns:r="http://schemas.openxmlformats.org/officeDocument/2006/relationships" id="261" r:id="R548948138a6e4034"/>
+    <p:sldId xmlns:r="http://schemas.openxmlformats.org/officeDocument/2006/relationships" id="262" r:id="R7ac5202aef9c4171"/>
+    <p:sldId xmlns:r="http://schemas.openxmlformats.org/officeDocument/2006/relationships" id="263" r:id="Rfc45a3d06d3f423a"/>
+    <p:sldId xmlns:r="http://schemas.openxmlformats.org/officeDocument/2006/relationships" id="264" r:id="R587eefd800d64e09"/>
+    <p:sldId xmlns:r="http://schemas.openxmlformats.org/officeDocument/2006/relationships" id="265" r:id="Rfa68646f573e4caf"/>
+    <p:sldId xmlns:r="http://schemas.openxmlformats.org/officeDocument/2006/relationships" id="266" r:id="R8b66f43ac11c4fcb"/>
+    <p:sldId xmlns:r="http://schemas.openxmlformats.org/officeDocument/2006/relationships" id="267" r:id="R269b5ed5c1944c46"/>
   </p:sldIdLst>
   <p:sldSz cx="12192000" cy="6858000"/>
   <p:notesSz cx="6858000" cy="9144000"/>
@@ -873,7 +873,7 @@
           <a:lstStyle xmlns:a="http://schemas.openxmlformats.org/drawingml/2006/main"/>
           <a:p xmlns:a="http://schemas.openxmlformats.org/drawingml/2006/main">
             <a:r>
-              <a:t>I do. Reveal the question, setup and each calculation stage one click at a time. Pupils watch before copying. Model answer: 44.856.</a:t>
+              <a:t>I do. Reveal the question, then reveal each mathematical change one click at a time. Point to the numbers and operation that changed before moving to the next line. Final answer: 44.856.</a:t>
             </a:r>
           </a:p>
         </p:txBody>
@@ -1291,7 +1291,7 @@
   </p:cSld>
   <p:clrMap bg1="lt1" tx1="dk1" bg2="lt2" tx2="dk2" accent1="accent1" accent2="accent2" accent3="accent3" accent4="accent4" accent5="accent5" accent6="accent6" hlink="hlink" folHlink="folHlink"/>
   <p:sldLayoutIdLst>
-    <p:sldLayoutId xmlns:r="http://schemas.openxmlformats.org/officeDocument/2006/relationships" id="2147483649" r:id="Rbc9d29b4ad5f4b34"/>
+    <p:sldLayoutId xmlns:r="http://schemas.openxmlformats.org/officeDocument/2006/relationships" id="2147483649" r:id="R079186b7d6894866"/>
   </p:sldLayoutIdLst>
   <p:txStyles>
     <p:titleStyle>
@@ -1842,7 +1842,7 @@
           <p:cNvPr id="12" name="">
             <a:extLst xmlns:a="http://schemas.openxmlformats.org/drawingml/2006/main">
               <a:ext uri="{FF2B5EF4-FFF2-40B4-BE49-F238E27FC236}">
-                <a16:creationId xmlns:a16="http://schemas.microsoft.com/office/drawing/2014/main" id="{46CB6F1A-C09A-468E-B171-950B58AD443C}"/>
+                <a16:creationId xmlns:a16="http://schemas.microsoft.com/office/drawing/2014/main" id="{DB1C0EE0-1DC9-4B9C-8E0A-95BF23DCC16C}"/>
               </a:ext>
             </a:extLst>
           </p:cNvPr>
@@ -1874,7 +1874,7 @@
           <p:cNvPr id="2" name="">
             <a:extLst xmlns:a="http://schemas.openxmlformats.org/drawingml/2006/main">
               <a:ext uri="{FF2B5EF4-FFF2-40B4-BE49-F238E27FC236}">
-                <a16:creationId xmlns:a16="http://schemas.microsoft.com/office/drawing/2014/main" id="{293FA430-7FD7-48ED-B28E-62025AA1E05F}"/>
+                <a16:creationId xmlns:a16="http://schemas.microsoft.com/office/drawing/2014/main" id="{885B6097-3D2A-4297-9BF4-F3EBB7008C3A}"/>
               </a:ext>
             </a:extLst>
           </p:cNvPr>
@@ -1931,7 +1931,7 @@
           <p:cNvPr id="3" name="">
             <a:extLst xmlns:a="http://schemas.openxmlformats.org/drawingml/2006/main">
               <a:ext uri="{FF2B5EF4-FFF2-40B4-BE49-F238E27FC236}">
-                <a16:creationId xmlns:a16="http://schemas.microsoft.com/office/drawing/2014/main" id="{F1159F0C-2FB5-43DB-8C57-9BB94B466CC6}"/>
+                <a16:creationId xmlns:a16="http://schemas.microsoft.com/office/drawing/2014/main" id="{2436D7A7-328A-4DFE-9B3E-A8429F95F8F1}"/>
               </a:ext>
             </a:extLst>
           </p:cNvPr>
@@ -1965,7 +1965,7 @@
           <p:cNvPr id="4" name="">
             <a:extLst xmlns:a="http://schemas.openxmlformats.org/drawingml/2006/main">
               <a:ext uri="{FF2B5EF4-FFF2-40B4-BE49-F238E27FC236}">
-                <a16:creationId xmlns:a16="http://schemas.microsoft.com/office/drawing/2014/main" id="{24A89218-3EE6-4228-B8D0-389092A5F113}"/>
+                <a16:creationId xmlns:a16="http://schemas.microsoft.com/office/drawing/2014/main" id="{370E2B74-635F-4668-9E90-44415FA4E489}"/>
               </a:ext>
             </a:extLst>
           </p:cNvPr>
@@ -2022,7 +2022,7 @@
           <p:cNvPr id="5" name="">
             <a:extLst xmlns:a="http://schemas.openxmlformats.org/drawingml/2006/main">
               <a:ext uri="{FF2B5EF4-FFF2-40B4-BE49-F238E27FC236}">
-                <a16:creationId xmlns:a16="http://schemas.microsoft.com/office/drawing/2014/main" id="{09627E24-C567-4E85-A4BD-CB9A41DDCD74}"/>
+                <a16:creationId xmlns:a16="http://schemas.microsoft.com/office/drawing/2014/main" id="{78DD949F-968C-49BB-96D0-3599423FA042}"/>
               </a:ext>
             </a:extLst>
           </p:cNvPr>
@@ -2079,7 +2079,7 @@
           <p:cNvPr id="6" name="">
             <a:extLst xmlns:a="http://schemas.openxmlformats.org/drawingml/2006/main">
               <a:ext uri="{FF2B5EF4-FFF2-40B4-BE49-F238E27FC236}">
-                <a16:creationId xmlns:a16="http://schemas.microsoft.com/office/drawing/2014/main" id="{182DC8B3-B87C-40D8-8DD3-7A0D3D6FAE1F}"/>
+                <a16:creationId xmlns:a16="http://schemas.microsoft.com/office/drawing/2014/main" id="{175FA5D7-9712-4A8F-8826-FB1C81903771}"/>
               </a:ext>
             </a:extLst>
           </p:cNvPr>
@@ -2113,7 +2113,7 @@
           <p:cNvPr id="7" name="">
             <a:extLst xmlns:a="http://schemas.openxmlformats.org/drawingml/2006/main">
               <a:ext uri="{FF2B5EF4-FFF2-40B4-BE49-F238E27FC236}">
-                <a16:creationId xmlns:a16="http://schemas.microsoft.com/office/drawing/2014/main" id="{A9BCF29D-B6CF-468A-837A-FD93BB06DB5F}"/>
+                <a16:creationId xmlns:a16="http://schemas.microsoft.com/office/drawing/2014/main" id="{DEBFCB3B-98BB-4999-BF4C-F69C5F17CAAF}"/>
               </a:ext>
             </a:extLst>
           </p:cNvPr>
@@ -2170,7 +2170,7 @@
           <p:cNvPr id="8" name="">
             <a:extLst xmlns:a="http://schemas.openxmlformats.org/drawingml/2006/main">
               <a:ext uri="{FF2B5EF4-FFF2-40B4-BE49-F238E27FC236}">
-                <a16:creationId xmlns:a16="http://schemas.microsoft.com/office/drawing/2014/main" id="{82DA18B4-BABF-41CC-8F7B-FC2B072DD545}"/>
+                <a16:creationId xmlns:a16="http://schemas.microsoft.com/office/drawing/2014/main" id="{4CC0D7C4-2B33-4932-95A1-8A4131BCF49C}"/>
               </a:ext>
             </a:extLst>
           </p:cNvPr>
@@ -2227,7 +2227,7 @@
           <p:cNvPr id="9" name="">
             <a:extLst xmlns:a="http://schemas.openxmlformats.org/drawingml/2006/main">
               <a:ext uri="{FF2B5EF4-FFF2-40B4-BE49-F238E27FC236}">
-                <a16:creationId xmlns:a16="http://schemas.microsoft.com/office/drawing/2014/main" id="{7A02C46B-D425-4F3A-8A50-38DC19654AA8}"/>
+                <a16:creationId xmlns:a16="http://schemas.microsoft.com/office/drawing/2014/main" id="{8548FBB2-AFB7-4A08-8401-A5D98047D5A2}"/>
               </a:ext>
             </a:extLst>
           </p:cNvPr>
@@ -2284,7 +2284,7 @@
           <p:cNvPr id="10" name="">
             <a:extLst xmlns:a="http://schemas.openxmlformats.org/drawingml/2006/main">
               <a:ext uri="{FF2B5EF4-FFF2-40B4-BE49-F238E27FC236}">
-                <a16:creationId xmlns:a16="http://schemas.microsoft.com/office/drawing/2014/main" id="{A0FEEFD8-3764-4923-A54A-9B1043ADD497}"/>
+                <a16:creationId xmlns:a16="http://schemas.microsoft.com/office/drawing/2014/main" id="{2D7B080A-7E74-4CB5-AC75-7F2775C82341}"/>
               </a:ext>
             </a:extLst>
           </p:cNvPr>
@@ -2341,7 +2341,7 @@
           <p:cNvPr id="11" name="">
             <a:extLst xmlns:a="http://schemas.openxmlformats.org/drawingml/2006/main">
               <a:ext uri="{FF2B5EF4-FFF2-40B4-BE49-F238E27FC236}">
-                <a16:creationId xmlns:a16="http://schemas.microsoft.com/office/drawing/2014/main" id="{1EC32B6C-2F07-4169-B139-F40237863955}"/>
+                <a16:creationId xmlns:a16="http://schemas.microsoft.com/office/drawing/2014/main" id="{8CA4E1B0-D1F3-459B-8BCA-CDA11DA5DBC4}"/>
               </a:ext>
             </a:extLst>
           </p:cNvPr>
@@ -2396,7 +2396,7 @@
     </p:spTree>
     <p:extLst>
       <p:ext uri="{BB962C8B-B14F-4D97-AF65-F5344CB8AC3E}">
-        <p14:creationId xmlns:p14="http://schemas.microsoft.com/office/powerpoint/2010/main" val="849940000"/>
+        <p14:creationId xmlns:p14="http://schemas.microsoft.com/office/powerpoint/2010/main" val="373263221"/>
       </p:ext>
     </p:extLst>
   </p:cSld>
@@ -2427,7 +2427,7 @@
           <p:cNvPr id="14" name="">
             <a:extLst xmlns:a="http://schemas.openxmlformats.org/drawingml/2006/main">
               <a:ext uri="{FF2B5EF4-FFF2-40B4-BE49-F238E27FC236}">
-                <a16:creationId xmlns:a16="http://schemas.microsoft.com/office/drawing/2014/main" id="{F6A69C1A-54A6-4C06-BC66-8CF85B0DF6D2}"/>
+                <a16:creationId xmlns:a16="http://schemas.microsoft.com/office/drawing/2014/main" id="{9288F25A-7462-4249-BBF0-1D09EF1AC3F4}"/>
               </a:ext>
             </a:extLst>
           </p:cNvPr>
@@ -2459,7 +2459,7 @@
           <p:cNvPr id="2" name="">
             <a:extLst xmlns:a="http://schemas.openxmlformats.org/drawingml/2006/main">
               <a:ext uri="{FF2B5EF4-FFF2-40B4-BE49-F238E27FC236}">
-                <a16:creationId xmlns:a16="http://schemas.microsoft.com/office/drawing/2014/main" id="{DBE037CC-69FB-4816-9790-D68164D37FD6}"/>
+                <a16:creationId xmlns:a16="http://schemas.microsoft.com/office/drawing/2014/main" id="{BF4B6871-DFEC-46B7-9A12-E341CB8572E2}"/>
               </a:ext>
             </a:extLst>
           </p:cNvPr>
@@ -2516,7 +2516,7 @@
           <p:cNvPr id="3" name="">
             <a:extLst xmlns:a="http://schemas.openxmlformats.org/drawingml/2006/main">
               <a:ext uri="{FF2B5EF4-FFF2-40B4-BE49-F238E27FC236}">
-                <a16:creationId xmlns:a16="http://schemas.microsoft.com/office/drawing/2014/main" id="{FEA28625-6235-40CD-8FEC-A49A6E89B520}"/>
+                <a16:creationId xmlns:a16="http://schemas.microsoft.com/office/drawing/2014/main" id="{3DD29E7D-2E38-47F6-A69B-FDEC44FE5BAE}"/>
               </a:ext>
             </a:extLst>
           </p:cNvPr>
@@ -2548,7 +2548,7 @@
           <p:cNvPr id="4" name="">
             <a:extLst xmlns:a="http://schemas.openxmlformats.org/drawingml/2006/main">
               <a:ext uri="{FF2B5EF4-FFF2-40B4-BE49-F238E27FC236}">
-                <a16:creationId xmlns:a16="http://schemas.microsoft.com/office/drawing/2014/main" id="{0553B0A2-CEB6-4EA7-BA23-0CB0243DE8AC}"/>
+                <a16:creationId xmlns:a16="http://schemas.microsoft.com/office/drawing/2014/main" id="{EDB08222-8637-4A4F-9940-E2B0F4AD8590}"/>
               </a:ext>
             </a:extLst>
           </p:cNvPr>
@@ -2605,7 +2605,7 @@
           <p:cNvPr id="5" name="">
             <a:extLst xmlns:a="http://schemas.openxmlformats.org/drawingml/2006/main">
               <a:ext uri="{FF2B5EF4-FFF2-40B4-BE49-F238E27FC236}">
-                <a16:creationId xmlns:a16="http://schemas.microsoft.com/office/drawing/2014/main" id="{9916F5DE-D759-4E26-83F5-6AB9F5EE4447}"/>
+                <a16:creationId xmlns:a16="http://schemas.microsoft.com/office/drawing/2014/main" id="{7735BDE0-DF82-4C2C-9260-F4F53BCC0105}"/>
               </a:ext>
             </a:extLst>
           </p:cNvPr>
@@ -2662,7 +2662,7 @@
           <p:cNvPr id="6" name="">
             <a:extLst xmlns:a="http://schemas.openxmlformats.org/drawingml/2006/main">
               <a:ext uri="{FF2B5EF4-FFF2-40B4-BE49-F238E27FC236}">
-                <a16:creationId xmlns:a16="http://schemas.microsoft.com/office/drawing/2014/main" id="{EDDD068D-2086-48F6-B74C-7A4937864058}"/>
+                <a16:creationId xmlns:a16="http://schemas.microsoft.com/office/drawing/2014/main" id="{91B354CA-51F7-4C87-A90B-8C4F0634061B}"/>
               </a:ext>
             </a:extLst>
           </p:cNvPr>
@@ -2719,7 +2719,7 @@
           <p:cNvPr id="7" name="">
             <a:extLst xmlns:a="http://schemas.openxmlformats.org/drawingml/2006/main">
               <a:ext uri="{FF2B5EF4-FFF2-40B4-BE49-F238E27FC236}">
-                <a16:creationId xmlns:a16="http://schemas.microsoft.com/office/drawing/2014/main" id="{9DA2B82E-0FA8-4783-9FA8-501A6FB28BBD}"/>
+                <a16:creationId xmlns:a16="http://schemas.microsoft.com/office/drawing/2014/main" id="{DB8E650E-5318-4BAA-9C76-47E1C32FB016}"/>
               </a:ext>
             </a:extLst>
           </p:cNvPr>
@@ -2751,7 +2751,7 @@
           <p:cNvPr id="8" name="">
             <a:extLst xmlns:a="http://schemas.openxmlformats.org/drawingml/2006/main">
               <a:ext uri="{FF2B5EF4-FFF2-40B4-BE49-F238E27FC236}">
-                <a16:creationId xmlns:a16="http://schemas.microsoft.com/office/drawing/2014/main" id="{6565AB5C-5C37-4D9E-B664-F97907CE4567}"/>
+                <a16:creationId xmlns:a16="http://schemas.microsoft.com/office/drawing/2014/main" id="{96B062B7-CC55-4CF1-91D6-4715C00141B5}"/>
               </a:ext>
             </a:extLst>
           </p:cNvPr>
@@ -2808,7 +2808,7 @@
           <p:cNvPr id="9" name="">
             <a:extLst xmlns:a="http://schemas.openxmlformats.org/drawingml/2006/main">
               <a:ext uri="{FF2B5EF4-FFF2-40B4-BE49-F238E27FC236}">
-                <a16:creationId xmlns:a16="http://schemas.microsoft.com/office/drawing/2014/main" id="{A8517767-5DCF-4C48-B6D6-1AEB7D20E7FB}"/>
+                <a16:creationId xmlns:a16="http://schemas.microsoft.com/office/drawing/2014/main" id="{AC981F8F-C9F3-471A-975B-88702F74DB1B}"/>
               </a:ext>
             </a:extLst>
           </p:cNvPr>
@@ -2865,7 +2865,7 @@
           <p:cNvPr id="10" name="">
             <a:extLst xmlns:a="http://schemas.openxmlformats.org/drawingml/2006/main">
               <a:ext uri="{FF2B5EF4-FFF2-40B4-BE49-F238E27FC236}">
-                <a16:creationId xmlns:a16="http://schemas.microsoft.com/office/drawing/2014/main" id="{DBCCF51D-1C6A-4878-B979-024B0033BA6E}"/>
+                <a16:creationId xmlns:a16="http://schemas.microsoft.com/office/drawing/2014/main" id="{C2B6D4C3-8DA6-468C-8C2C-41F142C9F0C1}"/>
               </a:ext>
             </a:extLst>
           </p:cNvPr>
@@ -2922,7 +2922,7 @@
           <p:cNvPr id="11" name="">
             <a:extLst xmlns:a="http://schemas.openxmlformats.org/drawingml/2006/main">
               <a:ext uri="{FF2B5EF4-FFF2-40B4-BE49-F238E27FC236}">
-                <a16:creationId xmlns:a16="http://schemas.microsoft.com/office/drawing/2014/main" id="{0C721D18-58E0-4E44-987C-57AAAA4BF19F}"/>
+                <a16:creationId xmlns:a16="http://schemas.microsoft.com/office/drawing/2014/main" id="{F649D425-F914-4E52-8560-252D85DE6EE5}"/>
               </a:ext>
             </a:extLst>
           </p:cNvPr>
@@ -2979,7 +2979,7 @@
           <p:cNvPr id="12" name="">
             <a:extLst xmlns:a="http://schemas.openxmlformats.org/drawingml/2006/main">
               <a:ext uri="{FF2B5EF4-FFF2-40B4-BE49-F238E27FC236}">
-                <a16:creationId xmlns:a16="http://schemas.microsoft.com/office/drawing/2014/main" id="{9B973516-7B88-4461-8BAC-11637DAB8D72}"/>
+                <a16:creationId xmlns:a16="http://schemas.microsoft.com/office/drawing/2014/main" id="{D26C6C66-69D0-48E8-A370-45AB292EC939}"/>
               </a:ext>
             </a:extLst>
           </p:cNvPr>
@@ -3036,7 +3036,7 @@
           <p:cNvPr id="13" name="">
             <a:extLst xmlns:a="http://schemas.openxmlformats.org/drawingml/2006/main">
               <a:ext uri="{FF2B5EF4-FFF2-40B4-BE49-F238E27FC236}">
-                <a16:creationId xmlns:a16="http://schemas.microsoft.com/office/drawing/2014/main" id="{8E0E41F5-EC02-4A0F-BB00-F06C06D15904}"/>
+                <a16:creationId xmlns:a16="http://schemas.microsoft.com/office/drawing/2014/main" id="{A2C9A841-9898-4A96-B200-5F02511457D9}"/>
               </a:ext>
             </a:extLst>
           </p:cNvPr>
@@ -3091,7 +3091,7 @@
     </p:spTree>
     <p:extLst>
       <p:ext uri="{BB962C8B-B14F-4D97-AF65-F5344CB8AC3E}">
-        <p14:creationId xmlns:p14="http://schemas.microsoft.com/office/powerpoint/2010/main" val="1290310151"/>
+        <p14:creationId xmlns:p14="http://schemas.microsoft.com/office/powerpoint/2010/main" val="1194625798"/>
       </p:ext>
     </p:extLst>
   </p:cSld>
@@ -3292,7 +3292,7 @@
           <p:cNvPr id="19" name="">
             <a:extLst xmlns:a="http://schemas.openxmlformats.org/drawingml/2006/main">
               <a:ext uri="{FF2B5EF4-FFF2-40B4-BE49-F238E27FC236}">
-                <a16:creationId xmlns:a16="http://schemas.microsoft.com/office/drawing/2014/main" id="{3F6936F8-66BB-42DA-9063-A8960AFF7771}"/>
+                <a16:creationId xmlns:a16="http://schemas.microsoft.com/office/drawing/2014/main" id="{99847A27-3805-4CF4-9FE0-5B722460415F}"/>
               </a:ext>
             </a:extLst>
           </p:cNvPr>
@@ -3324,7 +3324,7 @@
           <p:cNvPr id="2" name="">
             <a:extLst xmlns:a="http://schemas.openxmlformats.org/drawingml/2006/main">
               <a:ext uri="{FF2B5EF4-FFF2-40B4-BE49-F238E27FC236}">
-                <a16:creationId xmlns:a16="http://schemas.microsoft.com/office/drawing/2014/main" id="{0231AD39-1581-43F1-AA5E-828788C3CAAA}"/>
+                <a16:creationId xmlns:a16="http://schemas.microsoft.com/office/drawing/2014/main" id="{47479756-A531-4B20-9AFF-9E639651618A}"/>
               </a:ext>
             </a:extLst>
           </p:cNvPr>
@@ -3381,7 +3381,7 @@
           <p:cNvPr id="3" name="">
             <a:extLst xmlns:a="http://schemas.openxmlformats.org/drawingml/2006/main">
               <a:ext uri="{FF2B5EF4-FFF2-40B4-BE49-F238E27FC236}">
-                <a16:creationId xmlns:a16="http://schemas.microsoft.com/office/drawing/2014/main" id="{ECEAB3FA-38CA-477B-BA2A-74BA57B82933}"/>
+                <a16:creationId xmlns:a16="http://schemas.microsoft.com/office/drawing/2014/main" id="{589BA2E7-8EB4-4853-B6DB-7BEBD5379C8A}"/>
               </a:ext>
             </a:extLst>
           </p:cNvPr>
@@ -3413,7 +3413,7 @@
           <p:cNvPr id="4" name="">
             <a:extLst xmlns:a="http://schemas.openxmlformats.org/drawingml/2006/main">
               <a:ext uri="{FF2B5EF4-FFF2-40B4-BE49-F238E27FC236}">
-                <a16:creationId xmlns:a16="http://schemas.microsoft.com/office/drawing/2014/main" id="{845A9437-B757-4BC1-9981-CF1AAF90EB7E}"/>
+                <a16:creationId xmlns:a16="http://schemas.microsoft.com/office/drawing/2014/main" id="{53A58E4C-243B-4219-92EB-096CF141CB21}"/>
               </a:ext>
             </a:extLst>
           </p:cNvPr>
@@ -3470,7 +3470,7 @@
           <p:cNvPr id="5" name="">
             <a:extLst xmlns:a="http://schemas.openxmlformats.org/drawingml/2006/main">
               <a:ext uri="{FF2B5EF4-FFF2-40B4-BE49-F238E27FC236}">
-                <a16:creationId xmlns:a16="http://schemas.microsoft.com/office/drawing/2014/main" id="{D9229113-856D-4293-9006-4F44E5120158}"/>
+                <a16:creationId xmlns:a16="http://schemas.microsoft.com/office/drawing/2014/main" id="{F26F9F77-EED5-4939-ACDD-79569CADF1C5}"/>
               </a:ext>
             </a:extLst>
           </p:cNvPr>
@@ -3527,7 +3527,7 @@
           <p:cNvPr id="6" name="">
             <a:extLst xmlns:a="http://schemas.openxmlformats.org/drawingml/2006/main">
               <a:ext uri="{FF2B5EF4-FFF2-40B4-BE49-F238E27FC236}">
-                <a16:creationId xmlns:a16="http://schemas.microsoft.com/office/drawing/2014/main" id="{06598095-A856-4DCB-BC67-55170EBE69DB}"/>
+                <a16:creationId xmlns:a16="http://schemas.microsoft.com/office/drawing/2014/main" id="{F3EC4960-866A-4280-8CB7-D6991DAC1B7A}"/>
               </a:ext>
             </a:extLst>
           </p:cNvPr>
@@ -3584,7 +3584,7 @@
           <p:cNvPr id="7" name="">
             <a:extLst xmlns:a="http://schemas.openxmlformats.org/drawingml/2006/main">
               <a:ext uri="{FF2B5EF4-FFF2-40B4-BE49-F238E27FC236}">
-                <a16:creationId xmlns:a16="http://schemas.microsoft.com/office/drawing/2014/main" id="{EB5A8A06-DF8D-4B58-BEF7-CB908AA2A6DC}"/>
+                <a16:creationId xmlns:a16="http://schemas.microsoft.com/office/drawing/2014/main" id="{B4D0856D-C704-4CCD-A4D7-95CC416BD96C}"/>
               </a:ext>
             </a:extLst>
           </p:cNvPr>
@@ -3616,7 +3616,7 @@
           <p:cNvPr id="8" name="">
             <a:extLst xmlns:a="http://schemas.openxmlformats.org/drawingml/2006/main">
               <a:ext uri="{FF2B5EF4-FFF2-40B4-BE49-F238E27FC236}">
-                <a16:creationId xmlns:a16="http://schemas.microsoft.com/office/drawing/2014/main" id="{AB1141C9-F829-49D7-8F69-BF6A842A4D6B}"/>
+                <a16:creationId xmlns:a16="http://schemas.microsoft.com/office/drawing/2014/main" id="{B201EFDA-5BF4-473D-91EC-8419AC6A6A2B}"/>
               </a:ext>
             </a:extLst>
           </p:cNvPr>
@@ -3673,7 +3673,7 @@
           <p:cNvPr id="9" name="">
             <a:extLst xmlns:a="http://schemas.openxmlformats.org/drawingml/2006/main">
               <a:ext uri="{FF2B5EF4-FFF2-40B4-BE49-F238E27FC236}">
-                <a16:creationId xmlns:a16="http://schemas.microsoft.com/office/drawing/2014/main" id="{CD3BD08F-4A4F-488A-BFB9-440B9FC61F53}"/>
+                <a16:creationId xmlns:a16="http://schemas.microsoft.com/office/drawing/2014/main" id="{7F485D33-5380-4F3E-B73F-209ABB953FCD}"/>
               </a:ext>
             </a:extLst>
           </p:cNvPr>
@@ -3730,7 +3730,7 @@
           <p:cNvPr id="10" name="">
             <a:extLst xmlns:a="http://schemas.openxmlformats.org/drawingml/2006/main">
               <a:ext uri="{FF2B5EF4-FFF2-40B4-BE49-F238E27FC236}">
-                <a16:creationId xmlns:a16="http://schemas.microsoft.com/office/drawing/2014/main" id="{901A9A9D-03F1-476A-B049-F564AD0034B8}"/>
+                <a16:creationId xmlns:a16="http://schemas.microsoft.com/office/drawing/2014/main" id="{0D2E8ABC-F4B4-403C-A9B0-0058C9318653}"/>
               </a:ext>
             </a:extLst>
           </p:cNvPr>
@@ -3787,7 +3787,7 @@
           <p:cNvPr id="11" name="">
             <a:extLst xmlns:a="http://schemas.openxmlformats.org/drawingml/2006/main">
               <a:ext uri="{FF2B5EF4-FFF2-40B4-BE49-F238E27FC236}">
-                <a16:creationId xmlns:a16="http://schemas.microsoft.com/office/drawing/2014/main" id="{795E93CA-A062-44AC-9BED-214B0CB34C06}"/>
+                <a16:creationId xmlns:a16="http://schemas.microsoft.com/office/drawing/2014/main" id="{EF7BBE06-24DD-42B3-9698-0282AA2317F8}"/>
               </a:ext>
             </a:extLst>
           </p:cNvPr>
@@ -3821,7 +3821,7 @@
           <p:cNvPr id="12" name="">
             <a:extLst xmlns:a="http://schemas.openxmlformats.org/drawingml/2006/main">
               <a:ext uri="{FF2B5EF4-FFF2-40B4-BE49-F238E27FC236}">
-                <a16:creationId xmlns:a16="http://schemas.microsoft.com/office/drawing/2014/main" id="{1E09FF64-BC18-4A10-AA39-F0D635C4A474}"/>
+                <a16:creationId xmlns:a16="http://schemas.microsoft.com/office/drawing/2014/main" id="{6C7E2333-464A-4102-912C-EE1C224AB129}"/>
               </a:ext>
             </a:extLst>
           </p:cNvPr>
@@ -3878,7 +3878,7 @@
           <p:cNvPr id="13" name="">
             <a:extLst xmlns:a="http://schemas.openxmlformats.org/drawingml/2006/main">
               <a:ext uri="{FF2B5EF4-FFF2-40B4-BE49-F238E27FC236}">
-                <a16:creationId xmlns:a16="http://schemas.microsoft.com/office/drawing/2014/main" id="{09CD60FB-4DFE-4015-A00C-BD4F6FDE1C5F}"/>
+                <a16:creationId xmlns:a16="http://schemas.microsoft.com/office/drawing/2014/main" id="{B812B2CD-2EF5-4395-AFDA-55D74DC11B59}"/>
               </a:ext>
             </a:extLst>
           </p:cNvPr>
@@ -3935,7 +3935,7 @@
           <p:cNvPr id="14" name="">
             <a:extLst xmlns:a="http://schemas.openxmlformats.org/drawingml/2006/main">
               <a:ext uri="{FF2B5EF4-FFF2-40B4-BE49-F238E27FC236}">
-                <a16:creationId xmlns:a16="http://schemas.microsoft.com/office/drawing/2014/main" id="{739FF43D-11EE-409E-A4F5-FD31A5D1D797}"/>
+                <a16:creationId xmlns:a16="http://schemas.microsoft.com/office/drawing/2014/main" id="{ADE81CC5-6AC5-453D-B7FA-D1382AD8F183}"/>
               </a:ext>
             </a:extLst>
           </p:cNvPr>
@@ -3992,7 +3992,7 @@
           <p:cNvPr id="15" name="">
             <a:extLst xmlns:a="http://schemas.openxmlformats.org/drawingml/2006/main">
               <a:ext uri="{FF2B5EF4-FFF2-40B4-BE49-F238E27FC236}">
-                <a16:creationId xmlns:a16="http://schemas.microsoft.com/office/drawing/2014/main" id="{B4792AB1-F3BB-413E-9F34-91EE34EE4513}"/>
+                <a16:creationId xmlns:a16="http://schemas.microsoft.com/office/drawing/2014/main" id="{F02279DB-5CF4-4B10-A84D-71F132FA3717}"/>
               </a:ext>
             </a:extLst>
           </p:cNvPr>
@@ -4026,7 +4026,7 @@
           <p:cNvPr id="16" name="">
             <a:extLst xmlns:a="http://schemas.openxmlformats.org/drawingml/2006/main">
               <a:ext uri="{FF2B5EF4-FFF2-40B4-BE49-F238E27FC236}">
-                <a16:creationId xmlns:a16="http://schemas.microsoft.com/office/drawing/2014/main" id="{0B4335B7-22C6-4282-965E-0CD50C83626A}"/>
+                <a16:creationId xmlns:a16="http://schemas.microsoft.com/office/drawing/2014/main" id="{C6D0B5D5-1766-4C5A-AD24-2C1C153F3D76}"/>
               </a:ext>
             </a:extLst>
           </p:cNvPr>
@@ -4083,7 +4083,7 @@
           <p:cNvPr id="17" name="">
             <a:extLst xmlns:a="http://schemas.openxmlformats.org/drawingml/2006/main">
               <a:ext uri="{FF2B5EF4-FFF2-40B4-BE49-F238E27FC236}">
-                <a16:creationId xmlns:a16="http://schemas.microsoft.com/office/drawing/2014/main" id="{57DF985B-A776-40BE-AEBE-A6748EC857C8}"/>
+                <a16:creationId xmlns:a16="http://schemas.microsoft.com/office/drawing/2014/main" id="{693E32C7-C97A-42C8-9EEC-88D815BF0A3C}"/>
               </a:ext>
             </a:extLst>
           </p:cNvPr>
@@ -4140,7 +4140,7 @@
           <p:cNvPr id="18" name="">
             <a:extLst xmlns:a="http://schemas.openxmlformats.org/drawingml/2006/main">
               <a:ext uri="{FF2B5EF4-FFF2-40B4-BE49-F238E27FC236}">
-                <a16:creationId xmlns:a16="http://schemas.microsoft.com/office/drawing/2014/main" id="{2EC0F4C3-8B80-4884-959E-56B623BF787C}"/>
+                <a16:creationId xmlns:a16="http://schemas.microsoft.com/office/drawing/2014/main" id="{CAD27AF6-5680-4D11-AD83-B79F7B1D47C0}"/>
               </a:ext>
             </a:extLst>
           </p:cNvPr>
@@ -4195,7 +4195,7 @@
     </p:spTree>
     <p:extLst>
       <p:ext uri="{BB962C8B-B14F-4D97-AF65-F5344CB8AC3E}">
-        <p14:creationId xmlns:p14="http://schemas.microsoft.com/office/powerpoint/2010/main" val="375714749"/>
+        <p14:creationId xmlns:p14="http://schemas.microsoft.com/office/powerpoint/2010/main" val="897681095"/>
       </p:ext>
     </p:extLst>
   </p:cSld>
@@ -4350,7 +4350,7 @@
           <p:cNvPr id="23" name="">
             <a:extLst xmlns:a="http://schemas.openxmlformats.org/drawingml/2006/main">
               <a:ext uri="{FF2B5EF4-FFF2-40B4-BE49-F238E27FC236}">
-                <a16:creationId xmlns:a16="http://schemas.microsoft.com/office/drawing/2014/main" id="{DCEBE8B6-78C4-4A59-A006-68503246723B}"/>
+                <a16:creationId xmlns:a16="http://schemas.microsoft.com/office/drawing/2014/main" id="{405F97F5-FD32-44E9-A565-C2B8EB2E6629}"/>
               </a:ext>
             </a:extLst>
           </p:cNvPr>
@@ -4382,7 +4382,7 @@
           <p:cNvPr id="2" name="">
             <a:extLst xmlns:a="http://schemas.openxmlformats.org/drawingml/2006/main">
               <a:ext uri="{FF2B5EF4-FFF2-40B4-BE49-F238E27FC236}">
-                <a16:creationId xmlns:a16="http://schemas.microsoft.com/office/drawing/2014/main" id="{4B01A7B9-03C7-45B6-A702-2C74A1AD7B42}"/>
+                <a16:creationId xmlns:a16="http://schemas.microsoft.com/office/drawing/2014/main" id="{91A59839-1BC9-4EA5-9283-4B5154AB6BE6}"/>
               </a:ext>
             </a:extLst>
           </p:cNvPr>
@@ -4439,7 +4439,7 @@
           <p:cNvPr id="3" name="">
             <a:extLst xmlns:a="http://schemas.openxmlformats.org/drawingml/2006/main">
               <a:ext uri="{FF2B5EF4-FFF2-40B4-BE49-F238E27FC236}">
-                <a16:creationId xmlns:a16="http://schemas.microsoft.com/office/drawing/2014/main" id="{C0C526BD-A839-454A-85B8-05266DCBDA28}"/>
+                <a16:creationId xmlns:a16="http://schemas.microsoft.com/office/drawing/2014/main" id="{F1A883FE-D194-422E-B84F-879555EE1CE2}"/>
               </a:ext>
             </a:extLst>
           </p:cNvPr>
@@ -4471,7 +4471,7 @@
           <p:cNvPr id="4" name="">
             <a:extLst xmlns:a="http://schemas.openxmlformats.org/drawingml/2006/main">
               <a:ext uri="{FF2B5EF4-FFF2-40B4-BE49-F238E27FC236}">
-                <a16:creationId xmlns:a16="http://schemas.microsoft.com/office/drawing/2014/main" id="{06AF2A78-6C30-4D94-BC10-04A1D05FA942}"/>
+                <a16:creationId xmlns:a16="http://schemas.microsoft.com/office/drawing/2014/main" id="{0886CE2E-B45B-4EFC-902E-96C3D425B9A5}"/>
               </a:ext>
             </a:extLst>
           </p:cNvPr>
@@ -4528,7 +4528,7 @@
           <p:cNvPr id="5" name="">
             <a:extLst xmlns:a="http://schemas.openxmlformats.org/drawingml/2006/main">
               <a:ext uri="{FF2B5EF4-FFF2-40B4-BE49-F238E27FC236}">
-                <a16:creationId xmlns:a16="http://schemas.microsoft.com/office/drawing/2014/main" id="{494368D5-3B94-4FD3-AE40-09C2CBDDE8C3}"/>
+                <a16:creationId xmlns:a16="http://schemas.microsoft.com/office/drawing/2014/main" id="{788035DF-9AF4-4DAB-8C64-0B4E35AC834C}"/>
               </a:ext>
             </a:extLst>
           </p:cNvPr>
@@ -4585,7 +4585,7 @@
           <p:cNvPr id="6" name="">
             <a:extLst xmlns:a="http://schemas.openxmlformats.org/drawingml/2006/main">
               <a:ext uri="{FF2B5EF4-FFF2-40B4-BE49-F238E27FC236}">
-                <a16:creationId xmlns:a16="http://schemas.microsoft.com/office/drawing/2014/main" id="{8C8DFCC8-6DCC-4721-8A27-5ED79801E327}"/>
+                <a16:creationId xmlns:a16="http://schemas.microsoft.com/office/drawing/2014/main" id="{ABDC09F7-8450-4FC7-AAF0-E08B91D9C2B5}"/>
               </a:ext>
             </a:extLst>
           </p:cNvPr>
@@ -4642,7 +4642,7 @@
           <p:cNvPr id="7" name="">
             <a:extLst xmlns:a="http://schemas.openxmlformats.org/drawingml/2006/main">
               <a:ext uri="{FF2B5EF4-FFF2-40B4-BE49-F238E27FC236}">
-                <a16:creationId xmlns:a16="http://schemas.microsoft.com/office/drawing/2014/main" id="{8C699D51-E372-4087-B1D7-3FFE3E5DBC01}"/>
+                <a16:creationId xmlns:a16="http://schemas.microsoft.com/office/drawing/2014/main" id="{1687B7D0-354E-4837-95AC-C7F9C280B7DB}"/>
               </a:ext>
             </a:extLst>
           </p:cNvPr>
@@ -4674,7 +4674,7 @@
           <p:cNvPr id="8" name="">
             <a:extLst xmlns:a="http://schemas.openxmlformats.org/drawingml/2006/main">
               <a:ext uri="{FF2B5EF4-FFF2-40B4-BE49-F238E27FC236}">
-                <a16:creationId xmlns:a16="http://schemas.microsoft.com/office/drawing/2014/main" id="{276CE942-0121-439B-864E-9FC36664FBCA}"/>
+                <a16:creationId xmlns:a16="http://schemas.microsoft.com/office/drawing/2014/main" id="{0C626667-260C-47AE-8EFB-3AD67C32F1D0}"/>
               </a:ext>
             </a:extLst>
           </p:cNvPr>
@@ -4731,7 +4731,7 @@
           <p:cNvPr id="9" name="">
             <a:extLst xmlns:a="http://schemas.openxmlformats.org/drawingml/2006/main">
               <a:ext uri="{FF2B5EF4-FFF2-40B4-BE49-F238E27FC236}">
-                <a16:creationId xmlns:a16="http://schemas.microsoft.com/office/drawing/2014/main" id="{E5E13873-66AC-45BE-9D9A-6289DC9C8B6A}"/>
+                <a16:creationId xmlns:a16="http://schemas.microsoft.com/office/drawing/2014/main" id="{1662C8B7-A063-4BD6-A19E-32DC8275DE9D}"/>
               </a:ext>
             </a:extLst>
           </p:cNvPr>
@@ -4788,7 +4788,7 @@
           <p:cNvPr id="10" name="">
             <a:extLst xmlns:a="http://schemas.openxmlformats.org/drawingml/2006/main">
               <a:ext uri="{FF2B5EF4-FFF2-40B4-BE49-F238E27FC236}">
-                <a16:creationId xmlns:a16="http://schemas.microsoft.com/office/drawing/2014/main" id="{E220777C-A941-4235-988F-0A5CFBB9D8D8}"/>
+                <a16:creationId xmlns:a16="http://schemas.microsoft.com/office/drawing/2014/main" id="{84F58B24-9323-4D39-939B-9E7770E3BD0A}"/>
               </a:ext>
             </a:extLst>
           </p:cNvPr>
@@ -4822,7 +4822,7 @@
           <p:cNvPr id="11" name="">
             <a:extLst xmlns:a="http://schemas.openxmlformats.org/drawingml/2006/main">
               <a:ext uri="{FF2B5EF4-FFF2-40B4-BE49-F238E27FC236}">
-                <a16:creationId xmlns:a16="http://schemas.microsoft.com/office/drawing/2014/main" id="{FECC26E4-FF57-4185-A6FB-C77FBC248F9B}"/>
+                <a16:creationId xmlns:a16="http://schemas.microsoft.com/office/drawing/2014/main" id="{802762B3-0FAA-4F78-A9D8-F61E757B21D8}"/>
               </a:ext>
             </a:extLst>
           </p:cNvPr>
@@ -4854,7 +4854,7 @@
           <p:cNvPr id="12" name="">
             <a:extLst xmlns:a="http://schemas.openxmlformats.org/drawingml/2006/main">
               <a:ext uri="{FF2B5EF4-FFF2-40B4-BE49-F238E27FC236}">
-                <a16:creationId xmlns:a16="http://schemas.microsoft.com/office/drawing/2014/main" id="{D01B0921-67FC-46E9-92E9-279F5FE2B671}"/>
+                <a16:creationId xmlns:a16="http://schemas.microsoft.com/office/drawing/2014/main" id="{2C3840C5-2861-4A3B-87AC-907EA154971D}"/>
               </a:ext>
             </a:extLst>
           </p:cNvPr>
@@ -4911,7 +4911,7 @@
           <p:cNvPr id="13" name="">
             <a:extLst xmlns:a="http://schemas.openxmlformats.org/drawingml/2006/main">
               <a:ext uri="{FF2B5EF4-FFF2-40B4-BE49-F238E27FC236}">
-                <a16:creationId xmlns:a16="http://schemas.microsoft.com/office/drawing/2014/main" id="{A2F353F6-17D0-45AA-B989-4A8B98FBA021}"/>
+                <a16:creationId xmlns:a16="http://schemas.microsoft.com/office/drawing/2014/main" id="{1A81DE29-0009-439D-835F-8E2B0822FE4F}"/>
               </a:ext>
             </a:extLst>
           </p:cNvPr>
@@ -4968,7 +4968,7 @@
           <p:cNvPr id="14" name="">
             <a:extLst xmlns:a="http://schemas.openxmlformats.org/drawingml/2006/main">
               <a:ext uri="{FF2B5EF4-FFF2-40B4-BE49-F238E27FC236}">
-                <a16:creationId xmlns:a16="http://schemas.microsoft.com/office/drawing/2014/main" id="{99D5DA9A-63BF-4A10-923A-E53D2FCF7ABE}"/>
+                <a16:creationId xmlns:a16="http://schemas.microsoft.com/office/drawing/2014/main" id="{17A8ED0E-687A-4820-A889-529CFB68253B}"/>
               </a:ext>
             </a:extLst>
           </p:cNvPr>
@@ -5002,7 +5002,7 @@
           <p:cNvPr id="15" name="">
             <a:extLst xmlns:a="http://schemas.openxmlformats.org/drawingml/2006/main">
               <a:ext uri="{FF2B5EF4-FFF2-40B4-BE49-F238E27FC236}">
-                <a16:creationId xmlns:a16="http://schemas.microsoft.com/office/drawing/2014/main" id="{30B72822-FCFE-47B6-B71C-09D0D4D368C7}"/>
+                <a16:creationId xmlns:a16="http://schemas.microsoft.com/office/drawing/2014/main" id="{B87E3EC1-36DA-452D-B7B2-56C1306925FF}"/>
               </a:ext>
             </a:extLst>
           </p:cNvPr>
@@ -5034,7 +5034,7 @@
           <p:cNvPr id="16" name="">
             <a:extLst xmlns:a="http://schemas.openxmlformats.org/drawingml/2006/main">
               <a:ext uri="{FF2B5EF4-FFF2-40B4-BE49-F238E27FC236}">
-                <a16:creationId xmlns:a16="http://schemas.microsoft.com/office/drawing/2014/main" id="{DEA169A8-B018-4223-8F1A-1FD7DF46D7BB}"/>
+                <a16:creationId xmlns:a16="http://schemas.microsoft.com/office/drawing/2014/main" id="{61C238DD-AA19-458D-BA00-67598CDD37FD}"/>
               </a:ext>
             </a:extLst>
           </p:cNvPr>
@@ -5091,7 +5091,7 @@
           <p:cNvPr id="17" name="">
             <a:extLst xmlns:a="http://schemas.openxmlformats.org/drawingml/2006/main">
               <a:ext uri="{FF2B5EF4-FFF2-40B4-BE49-F238E27FC236}">
-                <a16:creationId xmlns:a16="http://schemas.microsoft.com/office/drawing/2014/main" id="{0822D899-4FE5-4AEB-9C66-20246AF0E753}"/>
+                <a16:creationId xmlns:a16="http://schemas.microsoft.com/office/drawing/2014/main" id="{F9673400-B3CB-4FC1-8FE8-E93F8CA2D6B0}"/>
               </a:ext>
             </a:extLst>
           </p:cNvPr>
@@ -5148,7 +5148,7 @@
           <p:cNvPr id="18" name="">
             <a:extLst xmlns:a="http://schemas.openxmlformats.org/drawingml/2006/main">
               <a:ext uri="{FF2B5EF4-FFF2-40B4-BE49-F238E27FC236}">
-                <a16:creationId xmlns:a16="http://schemas.microsoft.com/office/drawing/2014/main" id="{CB4DF428-794C-4BC6-85C2-8D800BA3C8B7}"/>
+                <a16:creationId xmlns:a16="http://schemas.microsoft.com/office/drawing/2014/main" id="{2CA535DE-2D35-4C39-A3CA-D36CB9FA795B}"/>
               </a:ext>
             </a:extLst>
           </p:cNvPr>
@@ -5182,7 +5182,7 @@
           <p:cNvPr id="19" name="">
             <a:extLst xmlns:a="http://schemas.openxmlformats.org/drawingml/2006/main">
               <a:ext uri="{FF2B5EF4-FFF2-40B4-BE49-F238E27FC236}">
-                <a16:creationId xmlns:a16="http://schemas.microsoft.com/office/drawing/2014/main" id="{15DF5674-3527-425C-853B-1A67340C97F5}"/>
+                <a16:creationId xmlns:a16="http://schemas.microsoft.com/office/drawing/2014/main" id="{C0AB5489-22AE-428A-918F-AA3D72B97484}"/>
               </a:ext>
             </a:extLst>
           </p:cNvPr>
@@ -5214,7 +5214,7 @@
           <p:cNvPr id="20" name="">
             <a:extLst xmlns:a="http://schemas.openxmlformats.org/drawingml/2006/main">
               <a:ext uri="{FF2B5EF4-FFF2-40B4-BE49-F238E27FC236}">
-                <a16:creationId xmlns:a16="http://schemas.microsoft.com/office/drawing/2014/main" id="{A97DE8BF-D7EB-4E46-B7E0-50556715C299}"/>
+                <a16:creationId xmlns:a16="http://schemas.microsoft.com/office/drawing/2014/main" id="{B751E2DA-9F8E-44FC-88E8-0ACCCCBD254A}"/>
               </a:ext>
             </a:extLst>
           </p:cNvPr>
@@ -5271,7 +5271,7 @@
           <p:cNvPr id="21" name="">
             <a:extLst xmlns:a="http://schemas.openxmlformats.org/drawingml/2006/main">
               <a:ext uri="{FF2B5EF4-FFF2-40B4-BE49-F238E27FC236}">
-                <a16:creationId xmlns:a16="http://schemas.microsoft.com/office/drawing/2014/main" id="{838D369E-D931-48E8-AB37-B3878DFC4EF4}"/>
+                <a16:creationId xmlns:a16="http://schemas.microsoft.com/office/drawing/2014/main" id="{CA5CC8B6-3203-4D7B-B84C-4565C1736906}"/>
               </a:ext>
             </a:extLst>
           </p:cNvPr>
@@ -5328,7 +5328,7 @@
           <p:cNvPr id="22" name="">
             <a:extLst xmlns:a="http://schemas.openxmlformats.org/drawingml/2006/main">
               <a:ext uri="{FF2B5EF4-FFF2-40B4-BE49-F238E27FC236}">
-                <a16:creationId xmlns:a16="http://schemas.microsoft.com/office/drawing/2014/main" id="{31F0C351-1A8C-42FC-8E13-91E9A986C5E8}"/>
+                <a16:creationId xmlns:a16="http://schemas.microsoft.com/office/drawing/2014/main" id="{9B88ED96-DA9E-4B44-8E34-492CF18C5324}"/>
               </a:ext>
             </a:extLst>
           </p:cNvPr>
@@ -5383,7 +5383,7 @@
     </p:spTree>
     <p:extLst>
       <p:ext uri="{BB962C8B-B14F-4D97-AF65-F5344CB8AC3E}">
-        <p14:creationId xmlns:p14="http://schemas.microsoft.com/office/powerpoint/2010/main" val="466026626"/>
+        <p14:creationId xmlns:p14="http://schemas.microsoft.com/office/powerpoint/2010/main" val="168617457"/>
       </p:ext>
     </p:extLst>
   </p:cSld>
@@ -5584,7 +5584,7 @@
           <p:cNvPr id="23" name="">
             <a:extLst xmlns:a="http://schemas.openxmlformats.org/drawingml/2006/main">
               <a:ext uri="{FF2B5EF4-FFF2-40B4-BE49-F238E27FC236}">
-                <a16:creationId xmlns:a16="http://schemas.microsoft.com/office/drawing/2014/main" id="{327AAC9F-B175-4A3E-A7F4-6E39A95CBEF7}"/>
+                <a16:creationId xmlns:a16="http://schemas.microsoft.com/office/drawing/2014/main" id="{57A08421-62D0-42CB-AF76-7AB996AC1D0A}"/>
               </a:ext>
             </a:extLst>
           </p:cNvPr>
@@ -5616,7 +5616,7 @@
           <p:cNvPr id="2" name="">
             <a:extLst xmlns:a="http://schemas.openxmlformats.org/drawingml/2006/main">
               <a:ext uri="{FF2B5EF4-FFF2-40B4-BE49-F238E27FC236}">
-                <a16:creationId xmlns:a16="http://schemas.microsoft.com/office/drawing/2014/main" id="{54A50A83-ED89-4CEC-92A1-629206B7F091}"/>
+                <a16:creationId xmlns:a16="http://schemas.microsoft.com/office/drawing/2014/main" id="{0712E812-1A7F-4B55-AF83-382C8E0A00AA}"/>
               </a:ext>
             </a:extLst>
           </p:cNvPr>
@@ -5673,7 +5673,7 @@
           <p:cNvPr id="3" name="">
             <a:extLst xmlns:a="http://schemas.openxmlformats.org/drawingml/2006/main">
               <a:ext uri="{FF2B5EF4-FFF2-40B4-BE49-F238E27FC236}">
-                <a16:creationId xmlns:a16="http://schemas.microsoft.com/office/drawing/2014/main" id="{D8A95C88-26BD-4260-BAD7-B114E5EFFF8D}"/>
+                <a16:creationId xmlns:a16="http://schemas.microsoft.com/office/drawing/2014/main" id="{DA06F4A3-CB39-4AB4-88FC-B6959A8E0E3D}"/>
               </a:ext>
             </a:extLst>
           </p:cNvPr>
@@ -5705,7 +5705,7 @@
           <p:cNvPr id="4" name="">
             <a:extLst xmlns:a="http://schemas.openxmlformats.org/drawingml/2006/main">
               <a:ext uri="{FF2B5EF4-FFF2-40B4-BE49-F238E27FC236}">
-                <a16:creationId xmlns:a16="http://schemas.microsoft.com/office/drawing/2014/main" id="{8A80B4EB-E333-44DD-B7DC-D4EC13D609F7}"/>
+                <a16:creationId xmlns:a16="http://schemas.microsoft.com/office/drawing/2014/main" id="{2D8D6D34-B158-4F0A-98CF-FC92B0D6C80A}"/>
               </a:ext>
             </a:extLst>
           </p:cNvPr>
@@ -5762,7 +5762,7 @@
           <p:cNvPr id="5" name="">
             <a:extLst xmlns:a="http://schemas.openxmlformats.org/drawingml/2006/main">
               <a:ext uri="{FF2B5EF4-FFF2-40B4-BE49-F238E27FC236}">
-                <a16:creationId xmlns:a16="http://schemas.microsoft.com/office/drawing/2014/main" id="{825E0003-A1BF-487E-BA68-497B8F764D51}"/>
+                <a16:creationId xmlns:a16="http://schemas.microsoft.com/office/drawing/2014/main" id="{4F128190-2E67-45E6-A915-34A741664048}"/>
               </a:ext>
             </a:extLst>
           </p:cNvPr>
@@ -5819,7 +5819,7 @@
           <p:cNvPr id="6" name="">
             <a:extLst xmlns:a="http://schemas.openxmlformats.org/drawingml/2006/main">
               <a:ext uri="{FF2B5EF4-FFF2-40B4-BE49-F238E27FC236}">
-                <a16:creationId xmlns:a16="http://schemas.microsoft.com/office/drawing/2014/main" id="{6E38147D-45E4-4E2E-8EF8-ADEBD466C159}"/>
+                <a16:creationId xmlns:a16="http://schemas.microsoft.com/office/drawing/2014/main" id="{7091CA7F-B712-424A-9A9E-DC8C814892B5}"/>
               </a:ext>
             </a:extLst>
           </p:cNvPr>
@@ -5876,7 +5876,7 @@
           <p:cNvPr id="7" name="">
             <a:extLst xmlns:a="http://schemas.openxmlformats.org/drawingml/2006/main">
               <a:ext uri="{FF2B5EF4-FFF2-40B4-BE49-F238E27FC236}">
-                <a16:creationId xmlns:a16="http://schemas.microsoft.com/office/drawing/2014/main" id="{AFD80714-7257-439A-A3CE-A82D3AE27FEA}"/>
+                <a16:creationId xmlns:a16="http://schemas.microsoft.com/office/drawing/2014/main" id="{91DF008C-4742-4BFF-8E38-6816115B9E00}"/>
               </a:ext>
             </a:extLst>
           </p:cNvPr>
@@ -5908,7 +5908,7 @@
           <p:cNvPr id="8" name="">
             <a:extLst xmlns:a="http://schemas.openxmlformats.org/drawingml/2006/main">
               <a:ext uri="{FF2B5EF4-FFF2-40B4-BE49-F238E27FC236}">
-                <a16:creationId xmlns:a16="http://schemas.microsoft.com/office/drawing/2014/main" id="{260D89E1-08D1-4EF5-B561-05092B74E046}"/>
+                <a16:creationId xmlns:a16="http://schemas.microsoft.com/office/drawing/2014/main" id="{BBF5E19F-28F6-4796-B006-5BD61B3AB7C1}"/>
               </a:ext>
             </a:extLst>
           </p:cNvPr>
@@ -5965,7 +5965,7 @@
           <p:cNvPr id="9" name="">
             <a:extLst xmlns:a="http://schemas.openxmlformats.org/drawingml/2006/main">
               <a:ext uri="{FF2B5EF4-FFF2-40B4-BE49-F238E27FC236}">
-                <a16:creationId xmlns:a16="http://schemas.microsoft.com/office/drawing/2014/main" id="{6C8C5FC3-709A-489D-B03B-51552D7D39DB}"/>
+                <a16:creationId xmlns:a16="http://schemas.microsoft.com/office/drawing/2014/main" id="{2CC40F2E-C7BE-42E2-9063-BA84F24210FE}"/>
               </a:ext>
             </a:extLst>
           </p:cNvPr>
@@ -6022,7 +6022,7 @@
           <p:cNvPr id="10" name="">
             <a:extLst xmlns:a="http://schemas.openxmlformats.org/drawingml/2006/main">
               <a:ext uri="{FF2B5EF4-FFF2-40B4-BE49-F238E27FC236}">
-                <a16:creationId xmlns:a16="http://schemas.microsoft.com/office/drawing/2014/main" id="{124F4773-44E5-4796-89C2-31D58A60FDAC}"/>
+                <a16:creationId xmlns:a16="http://schemas.microsoft.com/office/drawing/2014/main" id="{B52159B0-17C5-4908-B450-B125DBA701E5}"/>
               </a:ext>
             </a:extLst>
           </p:cNvPr>
@@ -6056,7 +6056,7 @@
           <p:cNvPr id="11" name="">
             <a:extLst xmlns:a="http://schemas.openxmlformats.org/drawingml/2006/main">
               <a:ext uri="{FF2B5EF4-FFF2-40B4-BE49-F238E27FC236}">
-                <a16:creationId xmlns:a16="http://schemas.microsoft.com/office/drawing/2014/main" id="{B47C6EE6-D72F-4528-B45E-B2928C413739}"/>
+                <a16:creationId xmlns:a16="http://schemas.microsoft.com/office/drawing/2014/main" id="{2BBB3F0D-2C3B-45EB-AD40-295AE641A4F6}"/>
               </a:ext>
             </a:extLst>
           </p:cNvPr>
@@ -6088,7 +6088,7 @@
           <p:cNvPr id="12" name="">
             <a:extLst xmlns:a="http://schemas.openxmlformats.org/drawingml/2006/main">
               <a:ext uri="{FF2B5EF4-FFF2-40B4-BE49-F238E27FC236}">
-                <a16:creationId xmlns:a16="http://schemas.microsoft.com/office/drawing/2014/main" id="{A6359D4E-3138-4121-81C6-C7D810EC2238}"/>
+                <a16:creationId xmlns:a16="http://schemas.microsoft.com/office/drawing/2014/main" id="{1D638730-6574-4700-BDF8-732C94CB10FF}"/>
               </a:ext>
             </a:extLst>
           </p:cNvPr>
@@ -6145,7 +6145,7 @@
           <p:cNvPr id="13" name="">
             <a:extLst xmlns:a="http://schemas.openxmlformats.org/drawingml/2006/main">
               <a:ext uri="{FF2B5EF4-FFF2-40B4-BE49-F238E27FC236}">
-                <a16:creationId xmlns:a16="http://schemas.microsoft.com/office/drawing/2014/main" id="{984AC018-4356-4671-8588-E2FAD01AE5D6}"/>
+                <a16:creationId xmlns:a16="http://schemas.microsoft.com/office/drawing/2014/main" id="{0D3C32D7-6418-46A9-866F-E975B75ADD10}"/>
               </a:ext>
             </a:extLst>
           </p:cNvPr>
@@ -6202,7 +6202,7 @@
           <p:cNvPr id="14" name="">
             <a:extLst xmlns:a="http://schemas.openxmlformats.org/drawingml/2006/main">
               <a:ext uri="{FF2B5EF4-FFF2-40B4-BE49-F238E27FC236}">
-                <a16:creationId xmlns:a16="http://schemas.microsoft.com/office/drawing/2014/main" id="{DC0ADE99-A5E2-4D03-9CBD-4574760083B2}"/>
+                <a16:creationId xmlns:a16="http://schemas.microsoft.com/office/drawing/2014/main" id="{54AB0531-7A79-4BA3-94EA-905470ABE147}"/>
               </a:ext>
             </a:extLst>
           </p:cNvPr>
@@ -6236,7 +6236,7 @@
           <p:cNvPr id="15" name="">
             <a:extLst xmlns:a="http://schemas.openxmlformats.org/drawingml/2006/main">
               <a:ext uri="{FF2B5EF4-FFF2-40B4-BE49-F238E27FC236}">
-                <a16:creationId xmlns:a16="http://schemas.microsoft.com/office/drawing/2014/main" id="{5E17B405-74AA-4595-B0EA-EDBFFE1FC87A}"/>
+                <a16:creationId xmlns:a16="http://schemas.microsoft.com/office/drawing/2014/main" id="{04318050-1B75-4095-959F-CA2EC9A3EF75}"/>
               </a:ext>
             </a:extLst>
           </p:cNvPr>
@@ -6268,7 +6268,7 @@
           <p:cNvPr id="16" name="">
             <a:extLst xmlns:a="http://schemas.openxmlformats.org/drawingml/2006/main">
               <a:ext uri="{FF2B5EF4-FFF2-40B4-BE49-F238E27FC236}">
-                <a16:creationId xmlns:a16="http://schemas.microsoft.com/office/drawing/2014/main" id="{BA1EE9A2-9093-42C4-A963-C82C2614367C}"/>
+                <a16:creationId xmlns:a16="http://schemas.microsoft.com/office/drawing/2014/main" id="{741371A5-62C1-4231-8C1F-39CA3AAFCDB9}"/>
               </a:ext>
             </a:extLst>
           </p:cNvPr>
@@ -6325,7 +6325,7 @@
           <p:cNvPr id="17" name="">
             <a:extLst xmlns:a="http://schemas.openxmlformats.org/drawingml/2006/main">
               <a:ext uri="{FF2B5EF4-FFF2-40B4-BE49-F238E27FC236}">
-                <a16:creationId xmlns:a16="http://schemas.microsoft.com/office/drawing/2014/main" id="{D6AB2321-B707-48A3-B9A6-BC7CD816A749}"/>
+                <a16:creationId xmlns:a16="http://schemas.microsoft.com/office/drawing/2014/main" id="{B74AC693-0B89-4921-B644-9054575B4712}"/>
               </a:ext>
             </a:extLst>
           </p:cNvPr>
@@ -6382,7 +6382,7 @@
           <p:cNvPr id="18" name="">
             <a:extLst xmlns:a="http://schemas.openxmlformats.org/drawingml/2006/main">
               <a:ext uri="{FF2B5EF4-FFF2-40B4-BE49-F238E27FC236}">
-                <a16:creationId xmlns:a16="http://schemas.microsoft.com/office/drawing/2014/main" id="{EF4363C8-59A6-4878-88D4-F1FBD98EAA0C}"/>
+                <a16:creationId xmlns:a16="http://schemas.microsoft.com/office/drawing/2014/main" id="{390B10FE-C6FA-45F4-9256-044B80181496}"/>
               </a:ext>
             </a:extLst>
           </p:cNvPr>
@@ -6416,7 +6416,7 @@
           <p:cNvPr id="19" name="">
             <a:extLst xmlns:a="http://schemas.openxmlformats.org/drawingml/2006/main">
               <a:ext uri="{FF2B5EF4-FFF2-40B4-BE49-F238E27FC236}">
-                <a16:creationId xmlns:a16="http://schemas.microsoft.com/office/drawing/2014/main" id="{2A39AA84-2963-4FC7-9A66-E5E0CDD0D94A}"/>
+                <a16:creationId xmlns:a16="http://schemas.microsoft.com/office/drawing/2014/main" id="{C18763C7-4418-4728-9D5F-635BD580F248}"/>
               </a:ext>
             </a:extLst>
           </p:cNvPr>
@@ -6448,7 +6448,7 @@
           <p:cNvPr id="20" name="">
             <a:extLst xmlns:a="http://schemas.openxmlformats.org/drawingml/2006/main">
               <a:ext uri="{FF2B5EF4-FFF2-40B4-BE49-F238E27FC236}">
-                <a16:creationId xmlns:a16="http://schemas.microsoft.com/office/drawing/2014/main" id="{E1312150-7412-4D86-A836-F516C2A2806D}"/>
+                <a16:creationId xmlns:a16="http://schemas.microsoft.com/office/drawing/2014/main" id="{F20A843C-D4A6-44A1-B424-787FD7FF0785}"/>
               </a:ext>
             </a:extLst>
           </p:cNvPr>
@@ -6505,7 +6505,7 @@
           <p:cNvPr id="21" name="">
             <a:extLst xmlns:a="http://schemas.openxmlformats.org/drawingml/2006/main">
               <a:ext uri="{FF2B5EF4-FFF2-40B4-BE49-F238E27FC236}">
-                <a16:creationId xmlns:a16="http://schemas.microsoft.com/office/drawing/2014/main" id="{C008ABC6-BB1F-4452-974F-7AE0AB28307E}"/>
+                <a16:creationId xmlns:a16="http://schemas.microsoft.com/office/drawing/2014/main" id="{22C3B3B2-AA53-49C2-B142-930764B1EA25}"/>
               </a:ext>
             </a:extLst>
           </p:cNvPr>
@@ -6562,7 +6562,7 @@
           <p:cNvPr id="22" name="">
             <a:extLst xmlns:a="http://schemas.openxmlformats.org/drawingml/2006/main">
               <a:ext uri="{FF2B5EF4-FFF2-40B4-BE49-F238E27FC236}">
-                <a16:creationId xmlns:a16="http://schemas.microsoft.com/office/drawing/2014/main" id="{FFCF6ECD-EA33-4E2E-B76A-D228FB6FB802}"/>
+                <a16:creationId xmlns:a16="http://schemas.microsoft.com/office/drawing/2014/main" id="{0197B013-9107-4275-B889-115F5181B547}"/>
               </a:ext>
             </a:extLst>
           </p:cNvPr>
@@ -6617,7 +6617,7 @@
     </p:spTree>
     <p:extLst>
       <p:ext uri="{BB962C8B-B14F-4D97-AF65-F5344CB8AC3E}">
-        <p14:creationId xmlns:p14="http://schemas.microsoft.com/office/powerpoint/2010/main" val="578930091"/>
+        <p14:creationId xmlns:p14="http://schemas.microsoft.com/office/powerpoint/2010/main" val="1286894924"/>
       </p:ext>
     </p:extLst>
   </p:cSld>
@@ -6818,7 +6818,7 @@
           <p:cNvPr id="16" name="">
             <a:extLst xmlns:a="http://schemas.openxmlformats.org/drawingml/2006/main">
               <a:ext uri="{FF2B5EF4-FFF2-40B4-BE49-F238E27FC236}">
-                <a16:creationId xmlns:a16="http://schemas.microsoft.com/office/drawing/2014/main" id="{88447629-9774-4E3A-B34F-01DF3BA75F1F}"/>
+                <a16:creationId xmlns:a16="http://schemas.microsoft.com/office/drawing/2014/main" id="{783AB597-6794-41C7-8761-68554C2C471B}"/>
               </a:ext>
             </a:extLst>
           </p:cNvPr>
@@ -6850,7 +6850,7 @@
           <p:cNvPr id="2" name="">
             <a:extLst xmlns:a="http://schemas.openxmlformats.org/drawingml/2006/main">
               <a:ext uri="{FF2B5EF4-FFF2-40B4-BE49-F238E27FC236}">
-                <a16:creationId xmlns:a16="http://schemas.microsoft.com/office/drawing/2014/main" id="{35356CD0-2233-45C9-B9D6-B13EDB8C36AA}"/>
+                <a16:creationId xmlns:a16="http://schemas.microsoft.com/office/drawing/2014/main" id="{81BEC899-D37E-4DE2-B925-D37C3FD94D4B}"/>
               </a:ext>
             </a:extLst>
           </p:cNvPr>
@@ -6907,7 +6907,7 @@
           <p:cNvPr id="3" name="">
             <a:extLst xmlns:a="http://schemas.openxmlformats.org/drawingml/2006/main">
               <a:ext uri="{FF2B5EF4-FFF2-40B4-BE49-F238E27FC236}">
-                <a16:creationId xmlns:a16="http://schemas.microsoft.com/office/drawing/2014/main" id="{1532DE07-ABF1-4F14-A4F6-7E7639E1B07E}"/>
+                <a16:creationId xmlns:a16="http://schemas.microsoft.com/office/drawing/2014/main" id="{7D7BE7F5-DA18-4A80-B4A6-5026CF3B8243}"/>
               </a:ext>
             </a:extLst>
           </p:cNvPr>
@@ -6939,7 +6939,7 @@
           <p:cNvPr id="4" name="">
             <a:extLst xmlns:a="http://schemas.openxmlformats.org/drawingml/2006/main">
               <a:ext uri="{FF2B5EF4-FFF2-40B4-BE49-F238E27FC236}">
-                <a16:creationId xmlns:a16="http://schemas.microsoft.com/office/drawing/2014/main" id="{2A1CEA0A-9FC1-4530-BAEA-4EC3FBCD32B6}"/>
+                <a16:creationId xmlns:a16="http://schemas.microsoft.com/office/drawing/2014/main" id="{A8D33E96-E9A9-4BB9-A38D-062EE3C0CF90}"/>
               </a:ext>
             </a:extLst>
           </p:cNvPr>
@@ -6996,7 +6996,7 @@
           <p:cNvPr id="5" name="">
             <a:extLst xmlns:a="http://schemas.openxmlformats.org/drawingml/2006/main">
               <a:ext uri="{FF2B5EF4-FFF2-40B4-BE49-F238E27FC236}">
-                <a16:creationId xmlns:a16="http://schemas.microsoft.com/office/drawing/2014/main" id="{1ED21690-D58B-4958-8FBE-BD51020D54AA}"/>
+                <a16:creationId xmlns:a16="http://schemas.microsoft.com/office/drawing/2014/main" id="{F0A8880A-A158-4B7B-B743-2BC64D19EAA5}"/>
               </a:ext>
             </a:extLst>
           </p:cNvPr>
@@ -7053,7 +7053,7 @@
           <p:cNvPr id="6" name="">
             <a:extLst xmlns:a="http://schemas.openxmlformats.org/drawingml/2006/main">
               <a:ext uri="{FF2B5EF4-FFF2-40B4-BE49-F238E27FC236}">
-                <a16:creationId xmlns:a16="http://schemas.microsoft.com/office/drawing/2014/main" id="{C01B5668-2F57-493D-BE05-B983B666FCB1}"/>
+                <a16:creationId xmlns:a16="http://schemas.microsoft.com/office/drawing/2014/main" id="{51CC3879-4B43-49B2-B2C3-D59F1B89213B}"/>
               </a:ext>
             </a:extLst>
           </p:cNvPr>
@@ -7110,7 +7110,7 @@
           <p:cNvPr id="7" name="">
             <a:extLst xmlns:a="http://schemas.openxmlformats.org/drawingml/2006/main">
               <a:ext uri="{FF2B5EF4-FFF2-40B4-BE49-F238E27FC236}">
-                <a16:creationId xmlns:a16="http://schemas.microsoft.com/office/drawing/2014/main" id="{BE9700A1-92BD-4386-9E71-348354CA4DEB}"/>
+                <a16:creationId xmlns:a16="http://schemas.microsoft.com/office/drawing/2014/main" id="{CEAB75CB-D608-4BE3-8541-26177FB1E543}"/>
               </a:ext>
             </a:extLst>
           </p:cNvPr>
@@ -7142,7 +7142,7 @@
           <p:cNvPr id="8" name="">
             <a:extLst xmlns:a="http://schemas.openxmlformats.org/drawingml/2006/main">
               <a:ext uri="{FF2B5EF4-FFF2-40B4-BE49-F238E27FC236}">
-                <a16:creationId xmlns:a16="http://schemas.microsoft.com/office/drawing/2014/main" id="{435D5937-1929-4F58-9EAB-689FA2F2D734}"/>
+                <a16:creationId xmlns:a16="http://schemas.microsoft.com/office/drawing/2014/main" id="{986B420D-D912-4A07-A78F-BBF7E23EF8AD}"/>
               </a:ext>
             </a:extLst>
           </p:cNvPr>
@@ -7199,7 +7199,7 @@
           <p:cNvPr id="9" name="">
             <a:extLst xmlns:a="http://schemas.openxmlformats.org/drawingml/2006/main">
               <a:ext uri="{FF2B5EF4-FFF2-40B4-BE49-F238E27FC236}">
-                <a16:creationId xmlns:a16="http://schemas.microsoft.com/office/drawing/2014/main" id="{5C46668B-B544-48BA-B008-7183679C4170}"/>
+                <a16:creationId xmlns:a16="http://schemas.microsoft.com/office/drawing/2014/main" id="{2C1FE1FA-5117-4D34-BF0D-04C6F766D932}"/>
               </a:ext>
             </a:extLst>
           </p:cNvPr>
@@ -7256,7 +7256,7 @@
           <p:cNvPr id="10" name="">
             <a:extLst xmlns:a="http://schemas.openxmlformats.org/drawingml/2006/main">
               <a:ext uri="{FF2B5EF4-FFF2-40B4-BE49-F238E27FC236}">
-                <a16:creationId xmlns:a16="http://schemas.microsoft.com/office/drawing/2014/main" id="{B5071731-2A8C-4F00-855E-620A2F5586E4}"/>
+                <a16:creationId xmlns:a16="http://schemas.microsoft.com/office/drawing/2014/main" id="{6F26E825-A7A0-43A4-8A45-707EF87F643C}"/>
               </a:ext>
             </a:extLst>
           </p:cNvPr>
@@ -7313,7 +7313,7 @@
           <p:cNvPr id="11" name="">
             <a:extLst xmlns:a="http://schemas.openxmlformats.org/drawingml/2006/main">
               <a:ext uri="{FF2B5EF4-FFF2-40B4-BE49-F238E27FC236}">
-                <a16:creationId xmlns:a16="http://schemas.microsoft.com/office/drawing/2014/main" id="{49F7DD95-63AC-4D71-BE36-687A69029DFE}"/>
+                <a16:creationId xmlns:a16="http://schemas.microsoft.com/office/drawing/2014/main" id="{A5F2A578-51E7-4B0E-9E21-DFED49C4B8B0}"/>
               </a:ext>
             </a:extLst>
           </p:cNvPr>
@@ -7345,7 +7345,7 @@
           <p:cNvPr id="12" name="">
             <a:extLst xmlns:a="http://schemas.openxmlformats.org/drawingml/2006/main">
               <a:ext uri="{FF2B5EF4-FFF2-40B4-BE49-F238E27FC236}">
-                <a16:creationId xmlns:a16="http://schemas.microsoft.com/office/drawing/2014/main" id="{79AE2729-BCB3-4366-AE44-D97E7B6583F2}"/>
+                <a16:creationId xmlns:a16="http://schemas.microsoft.com/office/drawing/2014/main" id="{D05501F2-A0DD-4A67-9C9C-9163B87180F8}"/>
               </a:ext>
             </a:extLst>
           </p:cNvPr>
@@ -7402,7 +7402,7 @@
           <p:cNvPr id="13" name="">
             <a:extLst xmlns:a="http://schemas.openxmlformats.org/drawingml/2006/main">
               <a:ext uri="{FF2B5EF4-FFF2-40B4-BE49-F238E27FC236}">
-                <a16:creationId xmlns:a16="http://schemas.microsoft.com/office/drawing/2014/main" id="{193D8292-147F-4BC2-8C87-212FDB742B67}"/>
+                <a16:creationId xmlns:a16="http://schemas.microsoft.com/office/drawing/2014/main" id="{F1A67814-23BE-40B6-9588-AFB413063DB3}"/>
               </a:ext>
             </a:extLst>
           </p:cNvPr>
@@ -7459,7 +7459,7 @@
           <p:cNvPr id="14" name="">
             <a:extLst xmlns:a="http://schemas.openxmlformats.org/drawingml/2006/main">
               <a:ext uri="{FF2B5EF4-FFF2-40B4-BE49-F238E27FC236}">
-                <a16:creationId xmlns:a16="http://schemas.microsoft.com/office/drawing/2014/main" id="{63D36D5F-6792-46F7-8FFE-2928C63944F7}"/>
+                <a16:creationId xmlns:a16="http://schemas.microsoft.com/office/drawing/2014/main" id="{D8D7B6AB-A2F3-4C5D-8696-F27A2F581413}"/>
               </a:ext>
             </a:extLst>
           </p:cNvPr>
@@ -7516,7 +7516,7 @@
           <p:cNvPr id="15" name="">
             <a:extLst xmlns:a="http://schemas.openxmlformats.org/drawingml/2006/main">
               <a:ext uri="{FF2B5EF4-FFF2-40B4-BE49-F238E27FC236}">
-                <a16:creationId xmlns:a16="http://schemas.microsoft.com/office/drawing/2014/main" id="{B3019F4E-FC61-4729-9726-BDAC95343D35}"/>
+                <a16:creationId xmlns:a16="http://schemas.microsoft.com/office/drawing/2014/main" id="{65CD210B-C8CE-4417-AEFF-EFEC0FD77859}"/>
               </a:ext>
             </a:extLst>
           </p:cNvPr>
@@ -7571,7 +7571,7 @@
     </p:spTree>
     <p:extLst>
       <p:ext uri="{BB962C8B-B14F-4D97-AF65-F5344CB8AC3E}">
-        <p14:creationId xmlns:p14="http://schemas.microsoft.com/office/powerpoint/2010/main" val="727385462"/>
+        <p14:creationId xmlns:p14="http://schemas.microsoft.com/office/powerpoint/2010/main" val="605531644"/>
       </p:ext>
     </p:extLst>
   </p:cSld>
@@ -7769,10 +7769,10 @@
       </p:grpSpPr>
       <p:sp>
         <p:nvSpPr>
-          <p:cNvPr id="23" name="">
-            <a:extLst xmlns:a="http://schemas.openxmlformats.org/drawingml/2006/main">
-              <a:ext uri="{FF2B5EF4-FFF2-40B4-BE49-F238E27FC236}">
-                <a16:creationId xmlns:a16="http://schemas.microsoft.com/office/drawing/2014/main" id="{25F1B6B8-EA52-46CD-BA1D-BF888F7074A6}"/>
+          <p:cNvPr id="26" name="">
+            <a:extLst xmlns:a="http://schemas.openxmlformats.org/drawingml/2006/main">
+              <a:ext uri="{FF2B5EF4-FFF2-40B4-BE49-F238E27FC236}">
+                <a16:creationId xmlns:a16="http://schemas.microsoft.com/office/drawing/2014/main" id="{E7EF66FB-9EFB-475B-997B-98F616A577C4}"/>
               </a:ext>
             </a:extLst>
           </p:cNvPr>
@@ -7804,7 +7804,7 @@
           <p:cNvPr id="2" name="">
             <a:extLst xmlns:a="http://schemas.openxmlformats.org/drawingml/2006/main">
               <a:ext uri="{FF2B5EF4-FFF2-40B4-BE49-F238E27FC236}">
-                <a16:creationId xmlns:a16="http://schemas.microsoft.com/office/drawing/2014/main" id="{1B722A7A-6B0A-447F-826C-B7DB040621FE}"/>
+                <a16:creationId xmlns:a16="http://schemas.microsoft.com/office/drawing/2014/main" id="{ED4B41FD-C317-463F-90C5-550BB4D561E4}"/>
               </a:ext>
             </a:extLst>
           </p:cNvPr>
@@ -7861,7 +7861,7 @@
           <p:cNvPr id="3" name="">
             <a:extLst xmlns:a="http://schemas.openxmlformats.org/drawingml/2006/main">
               <a:ext uri="{FF2B5EF4-FFF2-40B4-BE49-F238E27FC236}">
-                <a16:creationId xmlns:a16="http://schemas.microsoft.com/office/drawing/2014/main" id="{52C98A84-D47E-41BB-92F8-F313B89B028E}"/>
+                <a16:creationId xmlns:a16="http://schemas.microsoft.com/office/drawing/2014/main" id="{372321BD-54D1-4F00-8A60-2C7505AADC6B}"/>
               </a:ext>
             </a:extLst>
           </p:cNvPr>
@@ -7893,7 +7893,7 @@
           <p:cNvPr id="4" name="">
             <a:extLst xmlns:a="http://schemas.openxmlformats.org/drawingml/2006/main">
               <a:ext uri="{FF2B5EF4-FFF2-40B4-BE49-F238E27FC236}">
-                <a16:creationId xmlns:a16="http://schemas.microsoft.com/office/drawing/2014/main" id="{1E227135-9492-412B-BFCD-6963C9C83F18}"/>
+                <a16:creationId xmlns:a16="http://schemas.microsoft.com/office/drawing/2014/main" id="{B690BCC9-DB78-487F-8837-C922383B1A67}"/>
               </a:ext>
             </a:extLst>
           </p:cNvPr>
@@ -7950,7 +7950,7 @@
           <p:cNvPr id="5" name="">
             <a:extLst xmlns:a="http://schemas.openxmlformats.org/drawingml/2006/main">
               <a:ext uri="{FF2B5EF4-FFF2-40B4-BE49-F238E27FC236}">
-                <a16:creationId xmlns:a16="http://schemas.microsoft.com/office/drawing/2014/main" id="{5CE1BA10-C6D3-470C-8A41-E4EEC4991907}"/>
+                <a16:creationId xmlns:a16="http://schemas.microsoft.com/office/drawing/2014/main" id="{52B0886A-632B-4D7B-8877-2C18DD6D3637}"/>
               </a:ext>
             </a:extLst>
           </p:cNvPr>
@@ -8007,7 +8007,7 @@
           <p:cNvPr id="6" name="">
             <a:extLst xmlns:a="http://schemas.openxmlformats.org/drawingml/2006/main">
               <a:ext uri="{FF2B5EF4-FFF2-40B4-BE49-F238E27FC236}">
-                <a16:creationId xmlns:a16="http://schemas.microsoft.com/office/drawing/2014/main" id="{2DACB52E-65B4-4B52-8B7C-FBC91F297DAA}"/>
+                <a16:creationId xmlns:a16="http://schemas.microsoft.com/office/drawing/2014/main" id="{1BB0657F-AF44-4353-88BC-70B3B68EE6D5}"/>
               </a:ext>
             </a:extLst>
           </p:cNvPr>
@@ -8064,7 +8064,7 @@
           <p:cNvPr id="7" name="">
             <a:extLst xmlns:a="http://schemas.openxmlformats.org/drawingml/2006/main">
               <a:ext uri="{FF2B5EF4-FFF2-40B4-BE49-F238E27FC236}">
-                <a16:creationId xmlns:a16="http://schemas.microsoft.com/office/drawing/2014/main" id="{A3EFF513-A80B-4098-BECF-86F0A0A2CBB2}"/>
+                <a16:creationId xmlns:a16="http://schemas.microsoft.com/office/drawing/2014/main" id="{38EC18BE-5750-48C3-81FC-F381B65B5711}"/>
               </a:ext>
             </a:extLst>
           </p:cNvPr>
@@ -8096,7 +8096,7 @@
           <p:cNvPr id="8" name="">
             <a:extLst xmlns:a="http://schemas.openxmlformats.org/drawingml/2006/main">
               <a:ext uri="{FF2B5EF4-FFF2-40B4-BE49-F238E27FC236}">
-                <a16:creationId xmlns:a16="http://schemas.microsoft.com/office/drawing/2014/main" id="{98312E58-6FE9-47E3-80ED-EEAAD4DE6F36}"/>
+                <a16:creationId xmlns:a16="http://schemas.microsoft.com/office/drawing/2014/main" id="{15F211D9-5ACB-4A74-ACD1-BF2659B5E9B8}"/>
               </a:ext>
             </a:extLst>
           </p:cNvPr>
@@ -8153,7 +8153,7 @@
           <p:cNvPr id="9" name="">
             <a:extLst xmlns:a="http://schemas.openxmlformats.org/drawingml/2006/main">
               <a:ext uri="{FF2B5EF4-FFF2-40B4-BE49-F238E27FC236}">
-                <a16:creationId xmlns:a16="http://schemas.microsoft.com/office/drawing/2014/main" id="{AE0222B7-77F3-4AC6-996A-79F0E1F21E1F}"/>
+                <a16:creationId xmlns:a16="http://schemas.microsoft.com/office/drawing/2014/main" id="{61AAE544-31BD-4523-ACF9-BFBDA7E555C8}"/>
               </a:ext>
             </a:extLst>
           </p:cNvPr>
@@ -8210,19 +8210,19 @@
           <p:cNvPr id="10" name="">
             <a:extLst xmlns:a="http://schemas.openxmlformats.org/drawingml/2006/main">
               <a:ext uri="{FF2B5EF4-FFF2-40B4-BE49-F238E27FC236}">
-                <a16:creationId xmlns:a16="http://schemas.microsoft.com/office/drawing/2014/main" id="{CA1E1E6E-BC32-441E-AC0D-BC705A3F750F}"/>
-              </a:ext>
-            </a:extLst>
-          </p:cNvPr>
-          <p:cNvSpPr>
-            <a:spLocks xmlns:a="http://schemas.openxmlformats.org/drawingml/2006/main" noGrp="1"/>
-          </p:cNvSpPr>
-          <p:nvPr/>
-        </p:nvSpPr>
-        <p:spPr>
-          <a:xfrm xmlns:a="http://schemas.openxmlformats.org/drawingml/2006/main">
-            <a:off x="914400" y="1257300"/>
-            <a:ext cx="10363200" cy="781050"/>
+                <a16:creationId xmlns:a16="http://schemas.microsoft.com/office/drawing/2014/main" id="{16D1B67A-0A89-4D6E-B88B-7E4672244431}"/>
+              </a:ext>
+            </a:extLst>
+          </p:cNvPr>
+          <p:cNvSpPr>
+            <a:spLocks xmlns:a="http://schemas.openxmlformats.org/drawingml/2006/main" noGrp="1"/>
+          </p:cNvSpPr>
+          <p:nvPr/>
+        </p:nvSpPr>
+        <p:spPr>
+          <a:xfrm xmlns:a="http://schemas.openxmlformats.org/drawingml/2006/main">
+            <a:off x="857250" y="1219200"/>
+            <a:ext cx="10477500" cy="742950"/>
           </a:xfrm>
           <a:prstGeom xmlns:a="http://schemas.openxmlformats.org/drawingml/2006/main" prst="rect">
             <a:avLst/>
@@ -8239,7 +8239,7 @@
           <a:lstStyle xmlns:a="http://schemas.openxmlformats.org/drawingml/2006/main"/>
           <a:p xmlns:a="http://schemas.openxmlformats.org/drawingml/2006/main">
             <a:pPr algn="ctr">
-              <a:defRPr sz="2175" b="1">
+              <a:defRPr sz="2100" b="1">
                 <a:solidFill>
                   <a:srgbClr val="17253A"/>
                 </a:solidFill>
@@ -8249,7 +8249,7 @@
               </a:defRPr>
             </a:pPr>
             <a:r>
-              <a:rPr sz="2175" b="1">
+              <a:rPr sz="2100" b="1">
                 <a:solidFill>
                   <a:srgbClr val="17253A"/>
                 </a:solidFill>
@@ -8267,28 +8267,30 @@
           <p:cNvPr id="11" name="">
             <a:extLst xmlns:a="http://schemas.openxmlformats.org/drawingml/2006/main">
               <a:ext uri="{FF2B5EF4-FFF2-40B4-BE49-F238E27FC236}">
-                <a16:creationId xmlns:a16="http://schemas.microsoft.com/office/drawing/2014/main" id="{DD62FC35-D507-494D-BAB4-3250103D7C7C}"/>
-              </a:ext>
-            </a:extLst>
-          </p:cNvPr>
-          <p:cNvSpPr>
-            <a:spLocks xmlns:a="http://schemas.openxmlformats.org/drawingml/2006/main" noGrp="1"/>
-          </p:cNvSpPr>
-          <p:nvPr/>
-        </p:nvSpPr>
-        <p:spPr>
-          <a:xfrm xmlns:a="http://schemas.openxmlformats.org/drawingml/2006/main">
-            <a:off x="1000125" y="2247900"/>
-            <a:ext cx="476250" cy="476250"/>
-          </a:xfrm>
-          <a:prstGeom xmlns:a="http://schemas.openxmlformats.org/drawingml/2006/main" prst="ellipse">
+                <a16:creationId xmlns:a16="http://schemas.microsoft.com/office/drawing/2014/main" id="{76D921BF-6CEC-49C8-9E0D-185E28AAACFC}"/>
+              </a:ext>
+            </a:extLst>
+          </p:cNvPr>
+          <p:cNvSpPr>
+            <a:spLocks xmlns:a="http://schemas.openxmlformats.org/drawingml/2006/main" noGrp="1"/>
+          </p:cNvSpPr>
+          <p:nvPr/>
+        </p:nvSpPr>
+        <p:spPr>
+          <a:xfrm xmlns:a="http://schemas.openxmlformats.org/drawingml/2006/main">
+            <a:off x="971550" y="2124075"/>
+            <a:ext cx="38100" cy="3524250"/>
+          </a:xfrm>
+          <a:prstGeom xmlns:a="http://schemas.openxmlformats.org/drawingml/2006/main" prst="rect">
             <a:avLst/>
           </a:prstGeom>
           <a:solidFill xmlns:a="http://schemas.openxmlformats.org/drawingml/2006/main">
-            <a:srgbClr val="18324A"/>
+            <a:srgbClr val="2C6E73"/>
           </a:solidFill>
           <a:ln xmlns:a="http://schemas.openxmlformats.org/drawingml/2006/main" w="0">
-            <a:noFill/>
+            <a:solidFill>
+              <a:srgbClr val="2C6E73"/>
+            </a:solidFill>
           </a:ln>
         </p:spPr>
       </p:sp>
@@ -8297,19 +8299,19 @@
           <p:cNvPr id="12" name="">
             <a:extLst xmlns:a="http://schemas.openxmlformats.org/drawingml/2006/main">
               <a:ext uri="{FF2B5EF4-FFF2-40B4-BE49-F238E27FC236}">
-                <a16:creationId xmlns:a16="http://schemas.microsoft.com/office/drawing/2014/main" id="{C9587D49-442C-4440-B1D3-1FE77765B590}"/>
-              </a:ext>
-            </a:extLst>
-          </p:cNvPr>
-          <p:cNvSpPr>
-            <a:spLocks xmlns:a="http://schemas.openxmlformats.org/drawingml/2006/main" noGrp="1"/>
-          </p:cNvSpPr>
-          <p:nvPr/>
-        </p:nvSpPr>
-        <p:spPr>
-          <a:xfrm xmlns:a="http://schemas.openxmlformats.org/drawingml/2006/main">
-            <a:off x="1000125" y="2276475"/>
-            <a:ext cx="476250" cy="419100"/>
+                <a16:creationId xmlns:a16="http://schemas.microsoft.com/office/drawing/2014/main" id="{75A405BE-1381-4F04-8723-724DB46FB5DD}"/>
+              </a:ext>
+            </a:extLst>
+          </p:cNvPr>
+          <p:cNvSpPr>
+            <a:spLocks xmlns:a="http://schemas.openxmlformats.org/drawingml/2006/main" noGrp="1"/>
+          </p:cNvSpPr>
+          <p:nvPr/>
+        </p:nvSpPr>
+        <p:spPr>
+          <a:xfrm xmlns:a="http://schemas.openxmlformats.org/drawingml/2006/main">
+            <a:off x="1162050" y="2200275"/>
+            <a:ext cx="400050" cy="400050"/>
           </a:xfrm>
           <a:prstGeom xmlns:a="http://schemas.openxmlformats.org/drawingml/2006/main" prst="rect">
             <a:avLst/>
@@ -8326,9 +8328,9 @@
           <a:lstStyle xmlns:a="http://schemas.openxmlformats.org/drawingml/2006/main"/>
           <a:p xmlns:a="http://schemas.openxmlformats.org/drawingml/2006/main">
             <a:pPr algn="ctr">
-              <a:defRPr sz="1350" b="1">
-                <a:solidFill>
-                  <a:srgbClr val="FFFFFF"/>
+              <a:defRPr sz="1125" b="1">
+                <a:solidFill>
+                  <a:srgbClr val="2C6E73"/>
                 </a:solidFill>
                 <a:latin typeface="Arial"/>
                 <a:ea typeface="Arial"/>
@@ -8336,9 +8338,9 @@
               </a:defRPr>
             </a:pPr>
             <a:r>
-              <a:rPr sz="1350" b="1">
-                <a:solidFill>
-                  <a:srgbClr val="FFFFFF"/>
+              <a:rPr sz="1125" b="1">
+                <a:solidFill>
+                  <a:srgbClr val="2C6E73"/>
                 </a:solidFill>
                 <a:latin typeface="Arial"/>
                 <a:ea typeface="Arial"/>
@@ -8354,19 +8356,19 @@
           <p:cNvPr id="13" name="">
             <a:extLst xmlns:a="http://schemas.openxmlformats.org/drawingml/2006/main">
               <a:ext uri="{FF2B5EF4-FFF2-40B4-BE49-F238E27FC236}">
-                <a16:creationId xmlns:a16="http://schemas.microsoft.com/office/drawing/2014/main" id="{2D99874C-DE88-4B27-B7B1-A57858B6BB5C}"/>
-              </a:ext>
-            </a:extLst>
-          </p:cNvPr>
-          <p:cNvSpPr>
-            <a:spLocks xmlns:a="http://schemas.openxmlformats.org/drawingml/2006/main" noGrp="1"/>
-          </p:cNvSpPr>
-          <p:nvPr/>
-        </p:nvSpPr>
-        <p:spPr>
-          <a:xfrm xmlns:a="http://schemas.openxmlformats.org/drawingml/2006/main">
-            <a:off x="1714500" y="2181225"/>
-            <a:ext cx="9429750" cy="609600"/>
+                <a16:creationId xmlns:a16="http://schemas.microsoft.com/office/drawing/2014/main" id="{48CABBCD-982F-4D61-A96F-1FCB7C03D515}"/>
+              </a:ext>
+            </a:extLst>
+          </p:cNvPr>
+          <p:cNvSpPr>
+            <a:spLocks xmlns:a="http://schemas.openxmlformats.org/drawingml/2006/main" noGrp="1"/>
+          </p:cNvSpPr>
+          <p:nvPr/>
+        </p:nvSpPr>
+        <p:spPr>
+          <a:xfrm xmlns:a="http://schemas.openxmlformats.org/drawingml/2006/main">
+            <a:off x="1714500" y="2114550"/>
+            <a:ext cx="9525000" cy="638175"/>
           </a:xfrm>
           <a:prstGeom xmlns:a="http://schemas.openxmlformats.org/drawingml/2006/main" prst="rect">
             <a:avLst/>
@@ -8383,7 +8385,7 @@
           <a:lstStyle xmlns:a="http://schemas.openxmlformats.org/drawingml/2006/main"/>
           <a:p xmlns:a="http://schemas.openxmlformats.org/drawingml/2006/main">
             <a:pPr algn="l">
-              <a:defRPr sz="1500" b="0">
+              <a:defRPr sz="1575" b="0">
                 <a:solidFill>
                   <a:srgbClr val="17253A"/>
                 </a:solidFill>
@@ -8393,7 +8395,7 @@
               </a:defRPr>
             </a:pPr>
             <a:r>
-              <a:rPr sz="1500" b="0">
+              <a:rPr sz="1575" b="0">
                 <a:solidFill>
                   <a:srgbClr val="17253A"/>
                 </a:solidFill>
@@ -8401,7 +8403,7 @@
                 <a:ea typeface="Arial"/>
                 <a:cs typeface="Arial"/>
               </a:rPr>
-              <a:t>Identify the structure: Align digits by place value and include placeholder zeros.</a:t>
+              <a:t>6.408 × 7</a:t>
             </a:r>
           </a:p>
         </p:txBody>
@@ -8411,28 +8413,30 @@
           <p:cNvPr id="14" name="">
             <a:extLst xmlns:a="http://schemas.openxmlformats.org/drawingml/2006/main">
               <a:ext uri="{FF2B5EF4-FFF2-40B4-BE49-F238E27FC236}">
-                <a16:creationId xmlns:a16="http://schemas.microsoft.com/office/drawing/2014/main" id="{0B392369-2C65-4104-86AA-408525437AF1}"/>
-              </a:ext>
-            </a:extLst>
-          </p:cNvPr>
-          <p:cNvSpPr>
-            <a:spLocks xmlns:a="http://schemas.openxmlformats.org/drawingml/2006/main" noGrp="1"/>
-          </p:cNvSpPr>
-          <p:nvPr/>
-        </p:nvSpPr>
-        <p:spPr>
-          <a:xfrm xmlns:a="http://schemas.openxmlformats.org/drawingml/2006/main">
-            <a:off x="1000125" y="2990850"/>
-            <a:ext cx="476250" cy="476250"/>
-          </a:xfrm>
-          <a:prstGeom xmlns:a="http://schemas.openxmlformats.org/drawingml/2006/main" prst="ellipse">
+                <a16:creationId xmlns:a16="http://schemas.microsoft.com/office/drawing/2014/main" id="{9ADA858C-92FC-4E34-B5C7-24466C69DB0C}"/>
+              </a:ext>
+            </a:extLst>
+          </p:cNvPr>
+          <p:cNvSpPr>
+            <a:spLocks xmlns:a="http://schemas.openxmlformats.org/drawingml/2006/main" noGrp="1"/>
+          </p:cNvSpPr>
+          <p:nvPr/>
+        </p:nvSpPr>
+        <p:spPr>
+          <a:xfrm xmlns:a="http://schemas.openxmlformats.org/drawingml/2006/main">
+            <a:off x="1714500" y="2771775"/>
+            <a:ext cx="9334500" cy="9525"/>
+          </a:xfrm>
+          <a:prstGeom xmlns:a="http://schemas.openxmlformats.org/drawingml/2006/main" prst="rect">
             <a:avLst/>
           </a:prstGeom>
           <a:solidFill xmlns:a="http://schemas.openxmlformats.org/drawingml/2006/main">
-            <a:srgbClr val="2C6E73"/>
+            <a:srgbClr val="D9E0E6"/>
           </a:solidFill>
           <a:ln xmlns:a="http://schemas.openxmlformats.org/drawingml/2006/main" w="0">
-            <a:noFill/>
+            <a:solidFill>
+              <a:srgbClr val="D9E0E6"/>
+            </a:solidFill>
           </a:ln>
         </p:spPr>
       </p:sp>
@@ -8441,19 +8445,19 @@
           <p:cNvPr id="15" name="">
             <a:extLst xmlns:a="http://schemas.openxmlformats.org/drawingml/2006/main">
               <a:ext uri="{FF2B5EF4-FFF2-40B4-BE49-F238E27FC236}">
-                <a16:creationId xmlns:a16="http://schemas.microsoft.com/office/drawing/2014/main" id="{3C1A6245-A521-4246-AB86-FCBB0F065ED2}"/>
-              </a:ext>
-            </a:extLst>
-          </p:cNvPr>
-          <p:cNvSpPr>
-            <a:spLocks xmlns:a="http://schemas.openxmlformats.org/drawingml/2006/main" noGrp="1"/>
-          </p:cNvSpPr>
-          <p:nvPr/>
-        </p:nvSpPr>
-        <p:spPr>
-          <a:xfrm xmlns:a="http://schemas.openxmlformats.org/drawingml/2006/main">
-            <a:off x="1000125" y="3019425"/>
-            <a:ext cx="476250" cy="419100"/>
+                <a16:creationId xmlns:a16="http://schemas.microsoft.com/office/drawing/2014/main" id="{C6576956-E112-47B6-B444-1CB030BCDC27}"/>
+              </a:ext>
+            </a:extLst>
+          </p:cNvPr>
+          <p:cNvSpPr>
+            <a:spLocks xmlns:a="http://schemas.openxmlformats.org/drawingml/2006/main" noGrp="1"/>
+          </p:cNvSpPr>
+          <p:nvPr/>
+        </p:nvSpPr>
+        <p:spPr>
+          <a:xfrm xmlns:a="http://schemas.openxmlformats.org/drawingml/2006/main">
+            <a:off x="1162050" y="2905125"/>
+            <a:ext cx="400050" cy="400050"/>
           </a:xfrm>
           <a:prstGeom xmlns:a="http://schemas.openxmlformats.org/drawingml/2006/main" prst="rect">
             <a:avLst/>
@@ -8470,9 +8474,9 @@
           <a:lstStyle xmlns:a="http://schemas.openxmlformats.org/drawingml/2006/main"/>
           <a:p xmlns:a="http://schemas.openxmlformats.org/drawingml/2006/main">
             <a:pPr algn="ctr">
-              <a:defRPr sz="1350" b="1">
-                <a:solidFill>
-                  <a:srgbClr val="FFFFFF"/>
+              <a:defRPr sz="1125" b="1">
+                <a:solidFill>
+                  <a:srgbClr val="2C6E73"/>
                 </a:solidFill>
                 <a:latin typeface="Arial"/>
                 <a:ea typeface="Arial"/>
@@ -8480,9 +8484,9 @@
               </a:defRPr>
             </a:pPr>
             <a:r>
-              <a:rPr sz="1350" b="1">
-                <a:solidFill>
-                  <a:srgbClr val="FFFFFF"/>
+              <a:rPr sz="1125" b="1">
+                <a:solidFill>
+                  <a:srgbClr val="2C6E73"/>
                 </a:solidFill>
                 <a:latin typeface="Arial"/>
                 <a:ea typeface="Arial"/>
@@ -8498,19 +8502,19 @@
           <p:cNvPr id="16" name="">
             <a:extLst xmlns:a="http://schemas.openxmlformats.org/drawingml/2006/main">
               <a:ext uri="{FF2B5EF4-FFF2-40B4-BE49-F238E27FC236}">
-                <a16:creationId xmlns:a16="http://schemas.microsoft.com/office/drawing/2014/main" id="{26E47659-47FF-4EF8-BE0E-7AE3707A31AB}"/>
-              </a:ext>
-            </a:extLst>
-          </p:cNvPr>
-          <p:cNvSpPr>
-            <a:spLocks xmlns:a="http://schemas.openxmlformats.org/drawingml/2006/main" noGrp="1"/>
-          </p:cNvSpPr>
-          <p:nvPr/>
-        </p:nvSpPr>
-        <p:spPr>
-          <a:xfrm xmlns:a="http://schemas.openxmlformats.org/drawingml/2006/main">
-            <a:off x="1714500" y="2924175"/>
-            <a:ext cx="9429750" cy="609600"/>
+                <a16:creationId xmlns:a16="http://schemas.microsoft.com/office/drawing/2014/main" id="{D34BAA62-C48A-4DD1-B545-E965D4E7CE59}"/>
+              </a:ext>
+            </a:extLst>
+          </p:cNvPr>
+          <p:cNvSpPr>
+            <a:spLocks xmlns:a="http://schemas.openxmlformats.org/drawingml/2006/main" noGrp="1"/>
+          </p:cNvSpPr>
+          <p:nvPr/>
+        </p:nvSpPr>
+        <p:spPr>
+          <a:xfrm xmlns:a="http://schemas.openxmlformats.org/drawingml/2006/main">
+            <a:off x="1714500" y="2819400"/>
+            <a:ext cx="9525000" cy="638175"/>
           </a:xfrm>
           <a:prstGeom xmlns:a="http://schemas.openxmlformats.org/drawingml/2006/main" prst="rect">
             <a:avLst/>
@@ -8527,7 +8531,7 @@
           <a:lstStyle xmlns:a="http://schemas.openxmlformats.org/drawingml/2006/main"/>
           <a:p xmlns:a="http://schemas.openxmlformats.org/drawingml/2006/main">
             <a:pPr algn="l">
-              <a:defRPr sz="1500" b="0">
+              <a:defRPr sz="1575" b="0">
                 <a:solidFill>
                   <a:srgbClr val="17253A"/>
                 </a:solidFill>
@@ -8537,7 +8541,7 @@
               </a:defRPr>
             </a:pPr>
             <a:r>
-              <a:rPr sz="1500" b="0">
+              <a:rPr sz="1575" b="0">
                 <a:solidFill>
                   <a:srgbClr val="17253A"/>
                 </a:solidFill>
@@ -8545,7 +8549,7 @@
                 <a:ea typeface="Arial"/>
                 <a:cs typeface="Arial"/>
               </a:rPr>
-              <a:t>Set up the method: Calculate using the chosen mental or written method.</a:t>
+              <a:t>7 × 8 thousandths = 56 thousandths</a:t>
             </a:r>
           </a:p>
         </p:txBody>
@@ -8555,28 +8559,30 @@
           <p:cNvPr id="17" name="">
             <a:extLst xmlns:a="http://schemas.openxmlformats.org/drawingml/2006/main">
               <a:ext uri="{FF2B5EF4-FFF2-40B4-BE49-F238E27FC236}">
-                <a16:creationId xmlns:a16="http://schemas.microsoft.com/office/drawing/2014/main" id="{42DA9DF8-1A15-4E3D-8126-7FE4FD2381FB}"/>
-              </a:ext>
-            </a:extLst>
-          </p:cNvPr>
-          <p:cNvSpPr>
-            <a:spLocks xmlns:a="http://schemas.openxmlformats.org/drawingml/2006/main" noGrp="1"/>
-          </p:cNvSpPr>
-          <p:nvPr/>
-        </p:nvSpPr>
-        <p:spPr>
-          <a:xfrm xmlns:a="http://schemas.openxmlformats.org/drawingml/2006/main">
-            <a:off x="1000125" y="3733800"/>
-            <a:ext cx="476250" cy="476250"/>
-          </a:xfrm>
-          <a:prstGeom xmlns:a="http://schemas.openxmlformats.org/drawingml/2006/main" prst="ellipse">
+                <a16:creationId xmlns:a16="http://schemas.microsoft.com/office/drawing/2014/main" id="{5884C4E2-79CA-45E9-87B0-F1E7673F6808}"/>
+              </a:ext>
+            </a:extLst>
+          </p:cNvPr>
+          <p:cNvSpPr>
+            <a:spLocks xmlns:a="http://schemas.openxmlformats.org/drawingml/2006/main" noGrp="1"/>
+          </p:cNvSpPr>
+          <p:nvPr/>
+        </p:nvSpPr>
+        <p:spPr>
+          <a:xfrm xmlns:a="http://schemas.openxmlformats.org/drawingml/2006/main">
+            <a:off x="1714500" y="3476625"/>
+            <a:ext cx="9334500" cy="9525"/>
+          </a:xfrm>
+          <a:prstGeom xmlns:a="http://schemas.openxmlformats.org/drawingml/2006/main" prst="rect">
             <a:avLst/>
           </a:prstGeom>
           <a:solidFill xmlns:a="http://schemas.openxmlformats.org/drawingml/2006/main">
-            <a:srgbClr val="2C6E73"/>
+            <a:srgbClr val="D9E0E6"/>
           </a:solidFill>
           <a:ln xmlns:a="http://schemas.openxmlformats.org/drawingml/2006/main" w="0">
-            <a:noFill/>
+            <a:solidFill>
+              <a:srgbClr val="D9E0E6"/>
+            </a:solidFill>
           </a:ln>
         </p:spPr>
       </p:sp>
@@ -8585,19 +8591,19 @@
           <p:cNvPr id="18" name="">
             <a:extLst xmlns:a="http://schemas.openxmlformats.org/drawingml/2006/main">
               <a:ext uri="{FF2B5EF4-FFF2-40B4-BE49-F238E27FC236}">
-                <a16:creationId xmlns:a16="http://schemas.microsoft.com/office/drawing/2014/main" id="{0C559C99-6443-4DC1-8FCD-4B5C7C333FAD}"/>
-              </a:ext>
-            </a:extLst>
-          </p:cNvPr>
-          <p:cNvSpPr>
-            <a:spLocks xmlns:a="http://schemas.openxmlformats.org/drawingml/2006/main" noGrp="1"/>
-          </p:cNvSpPr>
-          <p:nvPr/>
-        </p:nvSpPr>
-        <p:spPr>
-          <a:xfrm xmlns:a="http://schemas.openxmlformats.org/drawingml/2006/main">
-            <a:off x="1000125" y="3762375"/>
-            <a:ext cx="476250" cy="419100"/>
+                <a16:creationId xmlns:a16="http://schemas.microsoft.com/office/drawing/2014/main" id="{7AE6263D-A9DB-4729-917B-1BA2995D2326}"/>
+              </a:ext>
+            </a:extLst>
+          </p:cNvPr>
+          <p:cNvSpPr>
+            <a:spLocks xmlns:a="http://schemas.openxmlformats.org/drawingml/2006/main" noGrp="1"/>
+          </p:cNvSpPr>
+          <p:nvPr/>
+        </p:nvSpPr>
+        <p:spPr>
+          <a:xfrm xmlns:a="http://schemas.openxmlformats.org/drawingml/2006/main">
+            <a:off x="1162050" y="3609975"/>
+            <a:ext cx="400050" cy="400050"/>
           </a:xfrm>
           <a:prstGeom xmlns:a="http://schemas.openxmlformats.org/drawingml/2006/main" prst="rect">
             <a:avLst/>
@@ -8614,9 +8620,9 @@
           <a:lstStyle xmlns:a="http://schemas.openxmlformats.org/drawingml/2006/main"/>
           <a:p xmlns:a="http://schemas.openxmlformats.org/drawingml/2006/main">
             <a:pPr algn="ctr">
-              <a:defRPr sz="1350" b="1">
-                <a:solidFill>
-                  <a:srgbClr val="FFFFFF"/>
+              <a:defRPr sz="1125" b="1">
+                <a:solidFill>
+                  <a:srgbClr val="2C6E73"/>
                 </a:solidFill>
                 <a:latin typeface="Arial"/>
                 <a:ea typeface="Arial"/>
@@ -8624,9 +8630,9 @@
               </a:defRPr>
             </a:pPr>
             <a:r>
-              <a:rPr sz="1350" b="1">
-                <a:solidFill>
-                  <a:srgbClr val="FFFFFF"/>
+              <a:rPr sz="1125" b="1">
+                <a:solidFill>
+                  <a:srgbClr val="2C6E73"/>
                 </a:solidFill>
                 <a:latin typeface="Arial"/>
                 <a:ea typeface="Arial"/>
@@ -8642,19 +8648,19 @@
           <p:cNvPr id="19" name="">
             <a:extLst xmlns:a="http://schemas.openxmlformats.org/drawingml/2006/main">
               <a:ext uri="{FF2B5EF4-FFF2-40B4-BE49-F238E27FC236}">
-                <a16:creationId xmlns:a16="http://schemas.microsoft.com/office/drawing/2014/main" id="{F8A44249-15B3-4BF9-B836-285346DAACA4}"/>
-              </a:ext>
-            </a:extLst>
-          </p:cNvPr>
-          <p:cNvSpPr>
-            <a:spLocks xmlns:a="http://schemas.openxmlformats.org/drawingml/2006/main" noGrp="1"/>
-          </p:cNvSpPr>
-          <p:nvPr/>
-        </p:nvSpPr>
-        <p:spPr>
-          <a:xfrm xmlns:a="http://schemas.openxmlformats.org/drawingml/2006/main">
-            <a:off x="1714500" y="3667125"/>
-            <a:ext cx="9429750" cy="609600"/>
+                <a16:creationId xmlns:a16="http://schemas.microsoft.com/office/drawing/2014/main" id="{40DAF6E8-E966-4698-9952-80EE7FD60CD1}"/>
+              </a:ext>
+            </a:extLst>
+          </p:cNvPr>
+          <p:cNvSpPr>
+            <a:spLocks xmlns:a="http://schemas.openxmlformats.org/drawingml/2006/main" noGrp="1"/>
+          </p:cNvSpPr>
+          <p:nvPr/>
+        </p:nvSpPr>
+        <p:spPr>
+          <a:xfrm xmlns:a="http://schemas.openxmlformats.org/drawingml/2006/main">
+            <a:off x="1714500" y="3524250"/>
+            <a:ext cx="9525000" cy="638175"/>
           </a:xfrm>
           <a:prstGeom xmlns:a="http://schemas.openxmlformats.org/drawingml/2006/main" prst="rect">
             <a:avLst/>
@@ -8671,7 +8677,7 @@
           <a:lstStyle xmlns:a="http://schemas.openxmlformats.org/drawingml/2006/main"/>
           <a:p xmlns:a="http://schemas.openxmlformats.org/drawingml/2006/main">
             <a:pPr algn="l">
-              <a:defRPr sz="1500" b="0">
+              <a:defRPr sz="1575" b="0">
                 <a:solidFill>
                   <a:srgbClr val="17253A"/>
                 </a:solidFill>
@@ -8681,7 +8687,7 @@
               </a:defRPr>
             </a:pPr>
             <a:r>
-              <a:rPr sz="1500" b="0">
+              <a:rPr sz="1575" b="0">
                 <a:solidFill>
                   <a:srgbClr val="17253A"/>
                 </a:solidFill>
@@ -8689,7 +8695,7 @@
                 <a:ea typeface="Arial"/>
                 <a:cs typeface="Arial"/>
               </a:rPr>
-              <a:t>Complete the calculation: 44.856.</a:t>
+              <a:t>7 × 408 = 2,856 thousandths</a:t>
             </a:r>
           </a:p>
         </p:txBody>
@@ -8699,28 +8705,30 @@
           <p:cNvPr id="20" name="">
             <a:extLst xmlns:a="http://schemas.openxmlformats.org/drawingml/2006/main">
               <a:ext uri="{FF2B5EF4-FFF2-40B4-BE49-F238E27FC236}">
-                <a16:creationId xmlns:a16="http://schemas.microsoft.com/office/drawing/2014/main" id="{79E23646-553F-4073-B47F-678B38E64A9B}"/>
-              </a:ext>
-            </a:extLst>
-          </p:cNvPr>
-          <p:cNvSpPr>
-            <a:spLocks xmlns:a="http://schemas.openxmlformats.org/drawingml/2006/main" noGrp="1"/>
-          </p:cNvSpPr>
-          <p:nvPr/>
-        </p:nvSpPr>
-        <p:spPr>
-          <a:xfrm xmlns:a="http://schemas.openxmlformats.org/drawingml/2006/main">
-            <a:off x="1000125" y="4476750"/>
-            <a:ext cx="476250" cy="476250"/>
-          </a:xfrm>
-          <a:prstGeom xmlns:a="http://schemas.openxmlformats.org/drawingml/2006/main" prst="ellipse">
+                <a16:creationId xmlns:a16="http://schemas.microsoft.com/office/drawing/2014/main" id="{9CCD8203-3073-4C7C-B1FE-89BE6CCAC642}"/>
+              </a:ext>
+            </a:extLst>
+          </p:cNvPr>
+          <p:cNvSpPr>
+            <a:spLocks xmlns:a="http://schemas.openxmlformats.org/drawingml/2006/main" noGrp="1"/>
+          </p:cNvSpPr>
+          <p:nvPr/>
+        </p:nvSpPr>
+        <p:spPr>
+          <a:xfrm xmlns:a="http://schemas.openxmlformats.org/drawingml/2006/main">
+            <a:off x="1714500" y="4181475"/>
+            <a:ext cx="9334500" cy="9525"/>
+          </a:xfrm>
+          <a:prstGeom xmlns:a="http://schemas.openxmlformats.org/drawingml/2006/main" prst="rect">
             <a:avLst/>
           </a:prstGeom>
           <a:solidFill xmlns:a="http://schemas.openxmlformats.org/drawingml/2006/main">
-            <a:srgbClr val="2C6E73"/>
+            <a:srgbClr val="D9E0E6"/>
           </a:solidFill>
           <a:ln xmlns:a="http://schemas.openxmlformats.org/drawingml/2006/main" w="0">
-            <a:noFill/>
+            <a:solidFill>
+              <a:srgbClr val="D9E0E6"/>
+            </a:solidFill>
           </a:ln>
         </p:spPr>
       </p:sp>
@@ -8729,19 +8737,19 @@
           <p:cNvPr id="21" name="">
             <a:extLst xmlns:a="http://schemas.openxmlformats.org/drawingml/2006/main">
               <a:ext uri="{FF2B5EF4-FFF2-40B4-BE49-F238E27FC236}">
-                <a16:creationId xmlns:a16="http://schemas.microsoft.com/office/drawing/2014/main" id="{0777DF3D-2DFB-4AA8-815E-40537213ED9E}"/>
-              </a:ext>
-            </a:extLst>
-          </p:cNvPr>
-          <p:cNvSpPr>
-            <a:spLocks xmlns:a="http://schemas.openxmlformats.org/drawingml/2006/main" noGrp="1"/>
-          </p:cNvSpPr>
-          <p:nvPr/>
-        </p:nvSpPr>
-        <p:spPr>
-          <a:xfrm xmlns:a="http://schemas.openxmlformats.org/drawingml/2006/main">
-            <a:off x="1000125" y="4505325"/>
-            <a:ext cx="476250" cy="419100"/>
+                <a16:creationId xmlns:a16="http://schemas.microsoft.com/office/drawing/2014/main" id="{60FB138F-F557-497B-AB57-992098C23650}"/>
+              </a:ext>
+            </a:extLst>
+          </p:cNvPr>
+          <p:cNvSpPr>
+            <a:spLocks xmlns:a="http://schemas.openxmlformats.org/drawingml/2006/main" noGrp="1"/>
+          </p:cNvSpPr>
+          <p:nvPr/>
+        </p:nvSpPr>
+        <p:spPr>
+          <a:xfrm xmlns:a="http://schemas.openxmlformats.org/drawingml/2006/main">
+            <a:off x="1162050" y="4314825"/>
+            <a:ext cx="400050" cy="400050"/>
           </a:xfrm>
           <a:prstGeom xmlns:a="http://schemas.openxmlformats.org/drawingml/2006/main" prst="rect">
             <a:avLst/>
@@ -8758,9 +8766,9 @@
           <a:lstStyle xmlns:a="http://schemas.openxmlformats.org/drawingml/2006/main"/>
           <a:p xmlns:a="http://schemas.openxmlformats.org/drawingml/2006/main">
             <a:pPr algn="ctr">
-              <a:defRPr sz="1350" b="1">
-                <a:solidFill>
-                  <a:srgbClr val="FFFFFF"/>
+              <a:defRPr sz="1125" b="1">
+                <a:solidFill>
+                  <a:srgbClr val="2C6E73"/>
                 </a:solidFill>
                 <a:latin typeface="Arial"/>
                 <a:ea typeface="Arial"/>
@@ -8768,9 +8776,9 @@
               </a:defRPr>
             </a:pPr>
             <a:r>
-              <a:rPr sz="1350" b="1">
-                <a:solidFill>
-                  <a:srgbClr val="FFFFFF"/>
+              <a:rPr sz="1125" b="1">
+                <a:solidFill>
+                  <a:srgbClr val="2C6E73"/>
                 </a:solidFill>
                 <a:latin typeface="Arial"/>
                 <a:ea typeface="Arial"/>
@@ -8786,19 +8794,19 @@
           <p:cNvPr id="22" name="">
             <a:extLst xmlns:a="http://schemas.openxmlformats.org/drawingml/2006/main">
               <a:ext uri="{FF2B5EF4-FFF2-40B4-BE49-F238E27FC236}">
-                <a16:creationId xmlns:a16="http://schemas.microsoft.com/office/drawing/2014/main" id="{1E30A1C4-EC72-40FC-8509-04E18DD82DCB}"/>
-              </a:ext>
-            </a:extLst>
-          </p:cNvPr>
-          <p:cNvSpPr>
-            <a:spLocks xmlns:a="http://schemas.openxmlformats.org/drawingml/2006/main" noGrp="1"/>
-          </p:cNvSpPr>
-          <p:nvPr/>
-        </p:nvSpPr>
-        <p:spPr>
-          <a:xfrm xmlns:a="http://schemas.openxmlformats.org/drawingml/2006/main">
-            <a:off x="1714500" y="4410075"/>
-            <a:ext cx="9429750" cy="609600"/>
+                <a16:creationId xmlns:a16="http://schemas.microsoft.com/office/drawing/2014/main" id="{774297C2-A02A-4EBD-910C-6BC43A71603F}"/>
+              </a:ext>
+            </a:extLst>
+          </p:cNvPr>
+          <p:cNvSpPr>
+            <a:spLocks xmlns:a="http://schemas.openxmlformats.org/drawingml/2006/main" noGrp="1"/>
+          </p:cNvSpPr>
+          <p:nvPr/>
+        </p:nvSpPr>
+        <p:spPr>
+          <a:xfrm xmlns:a="http://schemas.openxmlformats.org/drawingml/2006/main">
+            <a:off x="1714500" y="4229100"/>
+            <a:ext cx="9525000" cy="638175"/>
           </a:xfrm>
           <a:prstGeom xmlns:a="http://schemas.openxmlformats.org/drawingml/2006/main" prst="rect">
             <a:avLst/>
@@ -8815,9 +8823,9 @@
           <a:lstStyle xmlns:a="http://schemas.openxmlformats.org/drawingml/2006/main"/>
           <a:p xmlns:a="http://schemas.openxmlformats.org/drawingml/2006/main">
             <a:pPr algn="l">
-              <a:defRPr sz="1500" b="1">
-                <a:solidFill>
-                  <a:srgbClr val="2F785D"/>
+              <a:defRPr sz="1575" b="0">
+                <a:solidFill>
+                  <a:srgbClr val="17253A"/>
                 </a:solidFill>
                 <a:latin typeface="Arial"/>
                 <a:ea typeface="Arial"/>
@@ -8825,15 +8833,161 @@
               </a:defRPr>
             </a:pPr>
             <a:r>
-              <a:rPr sz="1500" b="1">
+              <a:rPr sz="1575" b="0">
+                <a:solidFill>
+                  <a:srgbClr val="17253A"/>
+                </a:solidFill>
+                <a:latin typeface="Arial"/>
+                <a:ea typeface="Arial"/>
+                <a:cs typeface="Arial"/>
+              </a:rPr>
+              <a:t>7 × 6 = 42</a:t>
+            </a:r>
+          </a:p>
+        </p:txBody>
+      </p:sp>
+      <p:sp>
+        <p:nvSpPr>
+          <p:cNvPr id="23" name="">
+            <a:extLst xmlns:a="http://schemas.openxmlformats.org/drawingml/2006/main">
+              <a:ext uri="{FF2B5EF4-FFF2-40B4-BE49-F238E27FC236}">
+                <a16:creationId xmlns:a16="http://schemas.microsoft.com/office/drawing/2014/main" id="{47E64932-CE89-48B0-990C-9CA79C289637}"/>
+              </a:ext>
+            </a:extLst>
+          </p:cNvPr>
+          <p:cNvSpPr>
+            <a:spLocks xmlns:a="http://schemas.openxmlformats.org/drawingml/2006/main" noGrp="1"/>
+          </p:cNvSpPr>
+          <p:nvPr/>
+        </p:nvSpPr>
+        <p:spPr>
+          <a:xfrm xmlns:a="http://schemas.openxmlformats.org/drawingml/2006/main">
+            <a:off x="1714500" y="4886325"/>
+            <a:ext cx="9334500" cy="9525"/>
+          </a:xfrm>
+          <a:prstGeom xmlns:a="http://schemas.openxmlformats.org/drawingml/2006/main" prst="rect">
+            <a:avLst/>
+          </a:prstGeom>
+          <a:solidFill xmlns:a="http://schemas.openxmlformats.org/drawingml/2006/main">
+            <a:srgbClr val="D9E0E6"/>
+          </a:solidFill>
+          <a:ln xmlns:a="http://schemas.openxmlformats.org/drawingml/2006/main" w="0">
+            <a:solidFill>
+              <a:srgbClr val="D9E0E6"/>
+            </a:solidFill>
+          </a:ln>
+        </p:spPr>
+      </p:sp>
+      <p:sp>
+        <p:nvSpPr>
+          <p:cNvPr id="24" name="">
+            <a:extLst xmlns:a="http://schemas.openxmlformats.org/drawingml/2006/main">
+              <a:ext uri="{FF2B5EF4-FFF2-40B4-BE49-F238E27FC236}">
+                <a16:creationId xmlns:a16="http://schemas.microsoft.com/office/drawing/2014/main" id="{BB22582D-D9A2-4E6C-A16A-DB74EED55029}"/>
+              </a:ext>
+            </a:extLst>
+          </p:cNvPr>
+          <p:cNvSpPr>
+            <a:spLocks xmlns:a="http://schemas.openxmlformats.org/drawingml/2006/main" noGrp="1"/>
+          </p:cNvSpPr>
+          <p:nvPr/>
+        </p:nvSpPr>
+        <p:spPr>
+          <a:xfrm xmlns:a="http://schemas.openxmlformats.org/drawingml/2006/main">
+            <a:off x="1162050" y="5019675"/>
+            <a:ext cx="400050" cy="400050"/>
+          </a:xfrm>
+          <a:prstGeom xmlns:a="http://schemas.openxmlformats.org/drawingml/2006/main" prst="rect">
+            <a:avLst/>
+          </a:prstGeom>
+          <a:noFill xmlns:a="http://schemas.openxmlformats.org/drawingml/2006/main"/>
+          <a:ln xmlns:a="http://schemas.openxmlformats.org/drawingml/2006/main" w="0">
+            <a:noFill/>
+          </a:ln>
+        </p:spPr>
+        <p:txBody>
+          <a:bodyPr xmlns:a="http://schemas.openxmlformats.org/drawingml/2006/main" anchor="ctr">
+            <a:normAutofit fontScale="100000"/>
+          </a:bodyPr>
+          <a:lstStyle xmlns:a="http://schemas.openxmlformats.org/drawingml/2006/main"/>
+          <a:p xmlns:a="http://schemas.openxmlformats.org/drawingml/2006/main">
+            <a:pPr algn="ctr">
+              <a:defRPr sz="1125" b="1">
                 <a:solidFill>
                   <a:srgbClr val="2F785D"/>
                 </a:solidFill>
                 <a:latin typeface="Arial"/>
                 <a:ea typeface="Arial"/>
                 <a:cs typeface="Arial"/>
+              </a:defRPr>
+            </a:pPr>
+            <a:r>
+              <a:rPr sz="1125" b="1">
+                <a:solidFill>
+                  <a:srgbClr val="2F785D"/>
+                </a:solidFill>
+                <a:latin typeface="Arial"/>
+                <a:ea typeface="Arial"/>
+                <a:cs typeface="Arial"/>
               </a:rPr>
-              <a:t>Check the result: Estimate and check that the decimal point is reasonable.</a:t>
+              <a:t>5</a:t>
+            </a:r>
+          </a:p>
+        </p:txBody>
+      </p:sp>
+      <p:sp>
+        <p:nvSpPr>
+          <p:cNvPr id="25" name="">
+            <a:extLst xmlns:a="http://schemas.openxmlformats.org/drawingml/2006/main">
+              <a:ext uri="{FF2B5EF4-FFF2-40B4-BE49-F238E27FC236}">
+                <a16:creationId xmlns:a16="http://schemas.microsoft.com/office/drawing/2014/main" id="{7E10EFA9-ACDD-405A-A417-92421FBC7C61}"/>
+              </a:ext>
+            </a:extLst>
+          </p:cNvPr>
+          <p:cNvSpPr>
+            <a:spLocks xmlns:a="http://schemas.openxmlformats.org/drawingml/2006/main" noGrp="1"/>
+          </p:cNvSpPr>
+          <p:nvPr/>
+        </p:nvSpPr>
+        <p:spPr>
+          <a:xfrm xmlns:a="http://schemas.openxmlformats.org/drawingml/2006/main">
+            <a:off x="1714500" y="4933950"/>
+            <a:ext cx="9525000" cy="638175"/>
+          </a:xfrm>
+          <a:prstGeom xmlns:a="http://schemas.openxmlformats.org/drawingml/2006/main" prst="rect">
+            <a:avLst/>
+          </a:prstGeom>
+          <a:noFill xmlns:a="http://schemas.openxmlformats.org/drawingml/2006/main"/>
+          <a:ln xmlns:a="http://schemas.openxmlformats.org/drawingml/2006/main" w="0">
+            <a:noFill/>
+          </a:ln>
+        </p:spPr>
+        <p:txBody>
+          <a:bodyPr xmlns:a="http://schemas.openxmlformats.org/drawingml/2006/main" anchor="ctr">
+            <a:normAutofit fontScale="100000"/>
+          </a:bodyPr>
+          <a:lstStyle xmlns:a="http://schemas.openxmlformats.org/drawingml/2006/main"/>
+          <a:p xmlns:a="http://schemas.openxmlformats.org/drawingml/2006/main">
+            <a:pPr algn="l">
+              <a:defRPr sz="1575" b="1">
+                <a:solidFill>
+                  <a:srgbClr val="2F785D"/>
+                </a:solidFill>
+                <a:latin typeface="Arial"/>
+                <a:ea typeface="Arial"/>
+                <a:cs typeface="Arial"/>
+              </a:defRPr>
+            </a:pPr>
+            <a:r>
+              <a:rPr sz="1575" b="1">
+                <a:solidFill>
+                  <a:srgbClr val="2F785D"/>
+                </a:solidFill>
+                <a:latin typeface="Arial"/>
+                <a:ea typeface="Arial"/>
+                <a:cs typeface="Arial"/>
+              </a:rPr>
+              <a:t>44.856</a:t>
             </a:r>
           </a:p>
         </p:txBody>
@@ -8841,7 +8995,7 @@
     </p:spTree>
     <p:extLst>
       <p:ext uri="{BB962C8B-B14F-4D97-AF65-F5344CB8AC3E}">
-        <p14:creationId xmlns:p14="http://schemas.microsoft.com/office/powerpoint/2010/main" val="2087403754"/>
+        <p14:creationId xmlns:p14="http://schemas.microsoft.com/office/powerpoint/2010/main" val="443727077"/>
       </p:ext>
     </p:extLst>
   </p:cSld>
@@ -9078,6 +9232,51 @@
                       </p:childTnLst>
                     </p:cTn>
                   </p:par>
+                  <p:par>
+                    <p:cTn id="23" fill="hold">
+                      <p:stCondLst>
+                        <p:cond delay="indefinite"/>
+                      </p:stCondLst>
+                      <p:childTnLst>
+                        <p:par>
+                          <p:cTn id="24" fill="hold">
+                            <p:stCondLst>
+                              <p:cond delay="0"/>
+                            </p:stCondLst>
+                            <p:childTnLst>
+                              <p:par>
+                                <p:cTn id="25" presetID="1" presetClass="entr" presetSubtype="0" fill="hold" grpId="0" nodeType="clickEffect">
+                                  <p:stCondLst>
+                                    <p:cond delay="0"/>
+                                  </p:stCondLst>
+                                  <p:childTnLst>
+                                    <p:set>
+                                      <p:cBhvr>
+                                        <p:cTn id="26" dur="1" fill="hold">
+                                          <p:stCondLst>
+                                            <p:cond delay="0"/>
+                                          </p:stCondLst>
+                                        </p:cTn>
+                                        <p:tgtEl>
+                                          <p:spTgt spid="25"/>
+                                        </p:tgtEl>
+                                        <p:attrNameLst>
+                                          <p:attrName>style.visibility</p:attrName>
+                                        </p:attrNameLst>
+                                      </p:cBhvr>
+                                      <p:to>
+                                        <p:strVal val="visible"/>
+                                      </p:to>
+                                    </p:set>
+                                  </p:childTnLst>
+                                </p:cTn>
+                              </p:par>
+                            </p:childTnLst>
+                          </p:cTn>
+                        </p:par>
+                      </p:childTnLst>
+                    </p:cTn>
+                  </p:par>
                 </p:childTnLst>
               </p:cTn>
               <p:prevCondLst>
@@ -9105,6 +9304,7 @@
       <p:bldP spid="16" grpId="0"/>
       <p:bldP spid="19" grpId="0"/>
       <p:bldP spid="22" grpId="0"/>
+      <p:bldP spid="25" grpId="0"/>
     </p:bldLst>
   </p:timing>
 </p:sld>
@@ -9134,7 +9334,7 @@
           <p:cNvPr id="15" name="">
             <a:extLst xmlns:a="http://schemas.openxmlformats.org/drawingml/2006/main">
               <a:ext uri="{FF2B5EF4-FFF2-40B4-BE49-F238E27FC236}">
-                <a16:creationId xmlns:a16="http://schemas.microsoft.com/office/drawing/2014/main" id="{26ABC1B5-2588-44DB-8274-4A01AAC42689}"/>
+                <a16:creationId xmlns:a16="http://schemas.microsoft.com/office/drawing/2014/main" id="{B9572836-0FDA-4C68-A0E8-12E81F23E6A0}"/>
               </a:ext>
             </a:extLst>
           </p:cNvPr>
@@ -9166,7 +9366,7 @@
           <p:cNvPr id="2" name="">
             <a:extLst xmlns:a="http://schemas.openxmlformats.org/drawingml/2006/main">
               <a:ext uri="{FF2B5EF4-FFF2-40B4-BE49-F238E27FC236}">
-                <a16:creationId xmlns:a16="http://schemas.microsoft.com/office/drawing/2014/main" id="{65411E40-9750-49A6-A9DE-38E1C81C038A}"/>
+                <a16:creationId xmlns:a16="http://schemas.microsoft.com/office/drawing/2014/main" id="{62B2499C-7AF8-4DCF-8501-182353678426}"/>
               </a:ext>
             </a:extLst>
           </p:cNvPr>
@@ -9223,7 +9423,7 @@
           <p:cNvPr id="3" name="">
             <a:extLst xmlns:a="http://schemas.openxmlformats.org/drawingml/2006/main">
               <a:ext uri="{FF2B5EF4-FFF2-40B4-BE49-F238E27FC236}">
-                <a16:creationId xmlns:a16="http://schemas.microsoft.com/office/drawing/2014/main" id="{E3CC49AA-2586-401E-BC86-AEA75176F00D}"/>
+                <a16:creationId xmlns:a16="http://schemas.microsoft.com/office/drawing/2014/main" id="{557A6F3D-3E33-4502-B8EA-25E309D68FA8}"/>
               </a:ext>
             </a:extLst>
           </p:cNvPr>
@@ -9255,7 +9455,7 @@
           <p:cNvPr id="4" name="">
             <a:extLst xmlns:a="http://schemas.openxmlformats.org/drawingml/2006/main">
               <a:ext uri="{FF2B5EF4-FFF2-40B4-BE49-F238E27FC236}">
-                <a16:creationId xmlns:a16="http://schemas.microsoft.com/office/drawing/2014/main" id="{65501F53-F787-4837-B065-B3F5D9E5D36E}"/>
+                <a16:creationId xmlns:a16="http://schemas.microsoft.com/office/drawing/2014/main" id="{E85C5CCC-E8B9-405D-988C-64FA488AC7B6}"/>
               </a:ext>
             </a:extLst>
           </p:cNvPr>
@@ -9312,7 +9512,7 @@
           <p:cNvPr id="5" name="">
             <a:extLst xmlns:a="http://schemas.openxmlformats.org/drawingml/2006/main">
               <a:ext uri="{FF2B5EF4-FFF2-40B4-BE49-F238E27FC236}">
-                <a16:creationId xmlns:a16="http://schemas.microsoft.com/office/drawing/2014/main" id="{16394B9F-9462-44A7-919F-FE862A5D9052}"/>
+                <a16:creationId xmlns:a16="http://schemas.microsoft.com/office/drawing/2014/main" id="{3BCE1E17-E3DB-496A-8D6A-7A0D086C8C23}"/>
               </a:ext>
             </a:extLst>
           </p:cNvPr>
@@ -9369,7 +9569,7 @@
           <p:cNvPr id="6" name="">
             <a:extLst xmlns:a="http://schemas.openxmlformats.org/drawingml/2006/main">
               <a:ext uri="{FF2B5EF4-FFF2-40B4-BE49-F238E27FC236}">
-                <a16:creationId xmlns:a16="http://schemas.microsoft.com/office/drawing/2014/main" id="{43D9D771-E860-4B7C-8CE8-1E628A831135}"/>
+                <a16:creationId xmlns:a16="http://schemas.microsoft.com/office/drawing/2014/main" id="{8A8ACFE5-602F-4AAC-A38A-69B1D5330D16}"/>
               </a:ext>
             </a:extLst>
           </p:cNvPr>
@@ -9426,7 +9626,7 @@
           <p:cNvPr id="7" name="">
             <a:extLst xmlns:a="http://schemas.openxmlformats.org/drawingml/2006/main">
               <a:ext uri="{FF2B5EF4-FFF2-40B4-BE49-F238E27FC236}">
-                <a16:creationId xmlns:a16="http://schemas.microsoft.com/office/drawing/2014/main" id="{9F54D321-5815-44CF-AD28-30050B424F7D}"/>
+                <a16:creationId xmlns:a16="http://schemas.microsoft.com/office/drawing/2014/main" id="{274266B6-D723-4E57-AD0B-A031BF54BBFD}"/>
               </a:ext>
             </a:extLst>
           </p:cNvPr>
@@ -9458,7 +9658,7 @@
           <p:cNvPr id="8" name="">
             <a:extLst xmlns:a="http://schemas.openxmlformats.org/drawingml/2006/main">
               <a:ext uri="{FF2B5EF4-FFF2-40B4-BE49-F238E27FC236}">
-                <a16:creationId xmlns:a16="http://schemas.microsoft.com/office/drawing/2014/main" id="{DD67BC84-DFA4-45E4-8887-05E3C16BF96E}"/>
+                <a16:creationId xmlns:a16="http://schemas.microsoft.com/office/drawing/2014/main" id="{E9095386-E4A4-46BE-B905-6330A72244C0}"/>
               </a:ext>
             </a:extLst>
           </p:cNvPr>
@@ -9515,7 +9715,7 @@
           <p:cNvPr id="9" name="">
             <a:extLst xmlns:a="http://schemas.openxmlformats.org/drawingml/2006/main">
               <a:ext uri="{FF2B5EF4-FFF2-40B4-BE49-F238E27FC236}">
-                <a16:creationId xmlns:a16="http://schemas.microsoft.com/office/drawing/2014/main" id="{ED8098B9-D04B-4B25-ADC6-5B3C3F118BA1}"/>
+                <a16:creationId xmlns:a16="http://schemas.microsoft.com/office/drawing/2014/main" id="{70A4BEE5-6AC0-455E-971E-EDD37B4574BB}"/>
               </a:ext>
             </a:extLst>
           </p:cNvPr>
@@ -9572,7 +9772,7 @@
           <p:cNvPr id="10" name="">
             <a:extLst xmlns:a="http://schemas.openxmlformats.org/drawingml/2006/main">
               <a:ext uri="{FF2B5EF4-FFF2-40B4-BE49-F238E27FC236}">
-                <a16:creationId xmlns:a16="http://schemas.microsoft.com/office/drawing/2014/main" id="{03E4B2F4-EADE-4442-98A8-6A34149C56A2}"/>
+                <a16:creationId xmlns:a16="http://schemas.microsoft.com/office/drawing/2014/main" id="{BA436EE5-94A3-4731-90ED-92149513791C}"/>
               </a:ext>
             </a:extLst>
           </p:cNvPr>
@@ -9629,7 +9829,7 @@
           <p:cNvPr id="11" name="">
             <a:extLst xmlns:a="http://schemas.openxmlformats.org/drawingml/2006/main">
               <a:ext uri="{FF2B5EF4-FFF2-40B4-BE49-F238E27FC236}">
-                <a16:creationId xmlns:a16="http://schemas.microsoft.com/office/drawing/2014/main" id="{E2EC33A8-C0E9-4005-BF1A-8B3035B4BBE9}"/>
+                <a16:creationId xmlns:a16="http://schemas.microsoft.com/office/drawing/2014/main" id="{455BAEE2-84EA-4479-A930-7CE450DDB236}"/>
               </a:ext>
             </a:extLst>
           </p:cNvPr>
@@ -9686,7 +9886,7 @@
           <p:cNvPr id="12" name="">
             <a:extLst xmlns:a="http://schemas.openxmlformats.org/drawingml/2006/main">
               <a:ext uri="{FF2B5EF4-FFF2-40B4-BE49-F238E27FC236}">
-                <a16:creationId xmlns:a16="http://schemas.microsoft.com/office/drawing/2014/main" id="{F5D96483-82C8-4B0B-B4A2-0A0A0E3B3325}"/>
+                <a16:creationId xmlns:a16="http://schemas.microsoft.com/office/drawing/2014/main" id="{71720523-2F04-4772-9226-802FC734CC64}"/>
               </a:ext>
             </a:extLst>
           </p:cNvPr>
@@ -9718,7 +9918,7 @@
           <p:cNvPr id="13" name="">
             <a:extLst xmlns:a="http://schemas.openxmlformats.org/drawingml/2006/main">
               <a:ext uri="{FF2B5EF4-FFF2-40B4-BE49-F238E27FC236}">
-                <a16:creationId xmlns:a16="http://schemas.microsoft.com/office/drawing/2014/main" id="{D2D6689C-BAFB-4697-B69C-73DBDA5B0FA8}"/>
+                <a16:creationId xmlns:a16="http://schemas.microsoft.com/office/drawing/2014/main" id="{1EE567CA-E0B1-4002-B387-CE88AD0CD671}"/>
               </a:ext>
             </a:extLst>
           </p:cNvPr>
@@ -9775,7 +9975,7 @@
           <p:cNvPr id="14" name="">
             <a:extLst xmlns:a="http://schemas.openxmlformats.org/drawingml/2006/main">
               <a:ext uri="{FF2B5EF4-FFF2-40B4-BE49-F238E27FC236}">
-                <a16:creationId xmlns:a16="http://schemas.microsoft.com/office/drawing/2014/main" id="{5E818951-225F-4203-A9D9-29A2F631458E}"/>
+                <a16:creationId xmlns:a16="http://schemas.microsoft.com/office/drawing/2014/main" id="{A567B56D-C955-4F00-8481-7EE243A7024E}"/>
               </a:ext>
             </a:extLst>
           </p:cNvPr>
@@ -9830,7 +10030,7 @@
     </p:spTree>
     <p:extLst>
       <p:ext uri="{BB962C8B-B14F-4D97-AF65-F5344CB8AC3E}">
-        <p14:creationId xmlns:p14="http://schemas.microsoft.com/office/powerpoint/2010/main" val="431366812"/>
+        <p14:creationId xmlns:p14="http://schemas.microsoft.com/office/powerpoint/2010/main" val="948231181"/>
       </p:ext>
     </p:extLst>
   </p:cSld>
@@ -10031,7 +10231,7 @@
           <p:cNvPr id="16" name="">
             <a:extLst xmlns:a="http://schemas.openxmlformats.org/drawingml/2006/main">
               <a:ext uri="{FF2B5EF4-FFF2-40B4-BE49-F238E27FC236}">
-                <a16:creationId xmlns:a16="http://schemas.microsoft.com/office/drawing/2014/main" id="{0FC7DCDB-F0ED-4D9F-9F36-5F4B8F3C3FB2}"/>
+                <a16:creationId xmlns:a16="http://schemas.microsoft.com/office/drawing/2014/main" id="{14CFDD52-EC31-4E6E-B2E3-828138429240}"/>
               </a:ext>
             </a:extLst>
           </p:cNvPr>
@@ -10063,7 +10263,7 @@
           <p:cNvPr id="2" name="">
             <a:extLst xmlns:a="http://schemas.openxmlformats.org/drawingml/2006/main">
               <a:ext uri="{FF2B5EF4-FFF2-40B4-BE49-F238E27FC236}">
-                <a16:creationId xmlns:a16="http://schemas.microsoft.com/office/drawing/2014/main" id="{943ED907-7333-47B2-B334-D559BBD0D580}"/>
+                <a16:creationId xmlns:a16="http://schemas.microsoft.com/office/drawing/2014/main" id="{1C30E412-C04F-4901-897E-B207E2C02D9C}"/>
               </a:ext>
             </a:extLst>
           </p:cNvPr>
@@ -10120,7 +10320,7 @@
           <p:cNvPr id="3" name="">
             <a:extLst xmlns:a="http://schemas.openxmlformats.org/drawingml/2006/main">
               <a:ext uri="{FF2B5EF4-FFF2-40B4-BE49-F238E27FC236}">
-                <a16:creationId xmlns:a16="http://schemas.microsoft.com/office/drawing/2014/main" id="{75404C18-785F-4BB1-8C42-7B6E8E69BBDE}"/>
+                <a16:creationId xmlns:a16="http://schemas.microsoft.com/office/drawing/2014/main" id="{0FA6747C-0D54-4303-A134-BC3E710B2D09}"/>
               </a:ext>
             </a:extLst>
           </p:cNvPr>
@@ -10152,7 +10352,7 @@
           <p:cNvPr id="4" name="">
             <a:extLst xmlns:a="http://schemas.openxmlformats.org/drawingml/2006/main">
               <a:ext uri="{FF2B5EF4-FFF2-40B4-BE49-F238E27FC236}">
-                <a16:creationId xmlns:a16="http://schemas.microsoft.com/office/drawing/2014/main" id="{E9FD8261-3D55-49B3-A0D0-C60A9A31183B}"/>
+                <a16:creationId xmlns:a16="http://schemas.microsoft.com/office/drawing/2014/main" id="{D12215B8-ADF9-4990-BD7C-43A77338B57F}"/>
               </a:ext>
             </a:extLst>
           </p:cNvPr>
@@ -10209,7 +10409,7 @@
           <p:cNvPr id="5" name="">
             <a:extLst xmlns:a="http://schemas.openxmlformats.org/drawingml/2006/main">
               <a:ext uri="{FF2B5EF4-FFF2-40B4-BE49-F238E27FC236}">
-                <a16:creationId xmlns:a16="http://schemas.microsoft.com/office/drawing/2014/main" id="{6D61C95D-C24E-48B6-8383-0967BBE73AFB}"/>
+                <a16:creationId xmlns:a16="http://schemas.microsoft.com/office/drawing/2014/main" id="{F662B48A-79DF-4213-8E8F-104BC63361EC}"/>
               </a:ext>
             </a:extLst>
           </p:cNvPr>
@@ -10266,7 +10466,7 @@
           <p:cNvPr id="6" name="">
             <a:extLst xmlns:a="http://schemas.openxmlformats.org/drawingml/2006/main">
               <a:ext uri="{FF2B5EF4-FFF2-40B4-BE49-F238E27FC236}">
-                <a16:creationId xmlns:a16="http://schemas.microsoft.com/office/drawing/2014/main" id="{CFB13CB1-D530-4E94-87F2-E7876E9FE4F6}"/>
+                <a16:creationId xmlns:a16="http://schemas.microsoft.com/office/drawing/2014/main" id="{B969E40B-F0CA-442E-A130-B784E62EA5FF}"/>
               </a:ext>
             </a:extLst>
           </p:cNvPr>
@@ -10323,7 +10523,7 @@
           <p:cNvPr id="7" name="">
             <a:extLst xmlns:a="http://schemas.openxmlformats.org/drawingml/2006/main">
               <a:ext uri="{FF2B5EF4-FFF2-40B4-BE49-F238E27FC236}">
-                <a16:creationId xmlns:a16="http://schemas.microsoft.com/office/drawing/2014/main" id="{FFC4D753-5809-4495-A970-12D69DB764C8}"/>
+                <a16:creationId xmlns:a16="http://schemas.microsoft.com/office/drawing/2014/main" id="{38E48063-A070-41E8-8EAE-C8BA446E203B}"/>
               </a:ext>
             </a:extLst>
           </p:cNvPr>
@@ -10355,7 +10555,7 @@
           <p:cNvPr id="8" name="">
             <a:extLst xmlns:a="http://schemas.openxmlformats.org/drawingml/2006/main">
               <a:ext uri="{FF2B5EF4-FFF2-40B4-BE49-F238E27FC236}">
-                <a16:creationId xmlns:a16="http://schemas.microsoft.com/office/drawing/2014/main" id="{EB0B42A7-8648-4E89-8465-0647B70F3AF2}"/>
+                <a16:creationId xmlns:a16="http://schemas.microsoft.com/office/drawing/2014/main" id="{DAB0ECEE-8F3D-42A0-B0D2-F112D39FD3A7}"/>
               </a:ext>
             </a:extLst>
           </p:cNvPr>
@@ -10412,7 +10612,7 @@
           <p:cNvPr id="9" name="">
             <a:extLst xmlns:a="http://schemas.openxmlformats.org/drawingml/2006/main">
               <a:ext uri="{FF2B5EF4-FFF2-40B4-BE49-F238E27FC236}">
-                <a16:creationId xmlns:a16="http://schemas.microsoft.com/office/drawing/2014/main" id="{6A2BD26C-F474-4631-9972-8BC8D45AFB59}"/>
+                <a16:creationId xmlns:a16="http://schemas.microsoft.com/office/drawing/2014/main" id="{38562E0F-56A6-4831-8095-2929DB4FA48B}"/>
               </a:ext>
             </a:extLst>
           </p:cNvPr>
@@ -10469,7 +10669,7 @@
           <p:cNvPr id="10" name="">
             <a:extLst xmlns:a="http://schemas.openxmlformats.org/drawingml/2006/main">
               <a:ext uri="{FF2B5EF4-FFF2-40B4-BE49-F238E27FC236}">
-                <a16:creationId xmlns:a16="http://schemas.microsoft.com/office/drawing/2014/main" id="{6624BC9E-E4EA-4B42-BF9A-426F7DD4EA05}"/>
+                <a16:creationId xmlns:a16="http://schemas.microsoft.com/office/drawing/2014/main" id="{B4AFB979-A165-4361-B409-CE79A6E3B6C3}"/>
               </a:ext>
             </a:extLst>
           </p:cNvPr>
@@ -10526,7 +10726,7 @@
           <p:cNvPr id="11" name="">
             <a:extLst xmlns:a="http://schemas.openxmlformats.org/drawingml/2006/main">
               <a:ext uri="{FF2B5EF4-FFF2-40B4-BE49-F238E27FC236}">
-                <a16:creationId xmlns:a16="http://schemas.microsoft.com/office/drawing/2014/main" id="{990600C1-CD5E-4292-B2F2-ECC7EA8B5D1B}"/>
+                <a16:creationId xmlns:a16="http://schemas.microsoft.com/office/drawing/2014/main" id="{80F1A75D-4A81-4363-95D4-7C0BB7342AF5}"/>
               </a:ext>
             </a:extLst>
           </p:cNvPr>
@@ -10583,7 +10783,7 @@
           <p:cNvPr id="12" name="">
             <a:extLst xmlns:a="http://schemas.openxmlformats.org/drawingml/2006/main">
               <a:ext uri="{FF2B5EF4-FFF2-40B4-BE49-F238E27FC236}">
-                <a16:creationId xmlns:a16="http://schemas.microsoft.com/office/drawing/2014/main" id="{3B2C56CF-C653-452B-B43A-C99EC4AC25F4}"/>
+                <a16:creationId xmlns:a16="http://schemas.microsoft.com/office/drawing/2014/main" id="{3009E0F5-B609-4611-A09A-5959C7CD8EB7}"/>
               </a:ext>
             </a:extLst>
           </p:cNvPr>
@@ -10640,7 +10840,7 @@
           <p:cNvPr id="13" name="">
             <a:extLst xmlns:a="http://schemas.openxmlformats.org/drawingml/2006/main">
               <a:ext uri="{FF2B5EF4-FFF2-40B4-BE49-F238E27FC236}">
-                <a16:creationId xmlns:a16="http://schemas.microsoft.com/office/drawing/2014/main" id="{F0B8BBB7-8900-4549-B37C-104A83EC207C}"/>
+                <a16:creationId xmlns:a16="http://schemas.microsoft.com/office/drawing/2014/main" id="{D4C1BBB0-F228-4313-8F8B-81948C027588}"/>
               </a:ext>
             </a:extLst>
           </p:cNvPr>
@@ -10697,7 +10897,7 @@
           <p:cNvPr id="14" name="">
             <a:extLst xmlns:a="http://schemas.openxmlformats.org/drawingml/2006/main">
               <a:ext uri="{FF2B5EF4-FFF2-40B4-BE49-F238E27FC236}">
-                <a16:creationId xmlns:a16="http://schemas.microsoft.com/office/drawing/2014/main" id="{C3B7A7CA-31A7-4879-941A-71C93EBD50E3}"/>
+                <a16:creationId xmlns:a16="http://schemas.microsoft.com/office/drawing/2014/main" id="{FA839A6D-041D-4D26-B13F-88B821F6B8B4}"/>
               </a:ext>
             </a:extLst>
           </p:cNvPr>
@@ -10754,7 +10954,7 @@
           <p:cNvPr id="15" name="">
             <a:extLst xmlns:a="http://schemas.openxmlformats.org/drawingml/2006/main">
               <a:ext uri="{FF2B5EF4-FFF2-40B4-BE49-F238E27FC236}">
-                <a16:creationId xmlns:a16="http://schemas.microsoft.com/office/drawing/2014/main" id="{FAA86C09-B084-4714-BD3D-9E951CF18189}"/>
+                <a16:creationId xmlns:a16="http://schemas.microsoft.com/office/drawing/2014/main" id="{0A06CABB-153B-4B70-BE79-8A9B31532497}"/>
               </a:ext>
             </a:extLst>
           </p:cNvPr>
@@ -10809,7 +11009,7 @@
     </p:spTree>
     <p:extLst>
       <p:ext uri="{BB962C8B-B14F-4D97-AF65-F5344CB8AC3E}">
-        <p14:creationId xmlns:p14="http://schemas.microsoft.com/office/powerpoint/2010/main" val="2101214000"/>
+        <p14:creationId xmlns:p14="http://schemas.microsoft.com/office/powerpoint/2010/main" val="366260078"/>
       </p:ext>
     </p:extLst>
   </p:cSld>
@@ -10964,7 +11164,7 @@
           <p:cNvPr id="16" name="">
             <a:extLst xmlns:a="http://schemas.openxmlformats.org/drawingml/2006/main">
               <a:ext uri="{FF2B5EF4-FFF2-40B4-BE49-F238E27FC236}">
-                <a16:creationId xmlns:a16="http://schemas.microsoft.com/office/drawing/2014/main" id="{EBFD513C-EE41-46EF-9637-041C2E780D89}"/>
+                <a16:creationId xmlns:a16="http://schemas.microsoft.com/office/drawing/2014/main" id="{2896DBB6-5C56-4EE3-858A-A8A3D54A536D}"/>
               </a:ext>
             </a:extLst>
           </p:cNvPr>
@@ -10996,7 +11196,7 @@
           <p:cNvPr id="2" name="">
             <a:extLst xmlns:a="http://schemas.openxmlformats.org/drawingml/2006/main">
               <a:ext uri="{FF2B5EF4-FFF2-40B4-BE49-F238E27FC236}">
-                <a16:creationId xmlns:a16="http://schemas.microsoft.com/office/drawing/2014/main" id="{17304E7D-185C-4B67-B5E6-39D1F8525D7D}"/>
+                <a16:creationId xmlns:a16="http://schemas.microsoft.com/office/drawing/2014/main" id="{09E28CF9-720D-4114-AEDA-D61BABE9FF31}"/>
               </a:ext>
             </a:extLst>
           </p:cNvPr>
@@ -11053,7 +11253,7 @@
           <p:cNvPr id="3" name="">
             <a:extLst xmlns:a="http://schemas.openxmlformats.org/drawingml/2006/main">
               <a:ext uri="{FF2B5EF4-FFF2-40B4-BE49-F238E27FC236}">
-                <a16:creationId xmlns:a16="http://schemas.microsoft.com/office/drawing/2014/main" id="{BDB13496-8C52-4BE9-82CF-6E8B92E8872B}"/>
+                <a16:creationId xmlns:a16="http://schemas.microsoft.com/office/drawing/2014/main" id="{10AAD764-A214-4659-A0FF-4FE4B3C6E6FD}"/>
               </a:ext>
             </a:extLst>
           </p:cNvPr>
@@ -11085,7 +11285,7 @@
           <p:cNvPr id="4" name="">
             <a:extLst xmlns:a="http://schemas.openxmlformats.org/drawingml/2006/main">
               <a:ext uri="{FF2B5EF4-FFF2-40B4-BE49-F238E27FC236}">
-                <a16:creationId xmlns:a16="http://schemas.microsoft.com/office/drawing/2014/main" id="{95762E5D-A383-4CB1-BB9A-6D8F3E5215AB}"/>
+                <a16:creationId xmlns:a16="http://schemas.microsoft.com/office/drawing/2014/main" id="{FC68E048-A2A0-45CE-965E-5105314FC942}"/>
               </a:ext>
             </a:extLst>
           </p:cNvPr>
@@ -11142,7 +11342,7 @@
           <p:cNvPr id="5" name="">
             <a:extLst xmlns:a="http://schemas.openxmlformats.org/drawingml/2006/main">
               <a:ext uri="{FF2B5EF4-FFF2-40B4-BE49-F238E27FC236}">
-                <a16:creationId xmlns:a16="http://schemas.microsoft.com/office/drawing/2014/main" id="{07C28525-EB4F-4483-9EBB-F06286FEDDE0}"/>
+                <a16:creationId xmlns:a16="http://schemas.microsoft.com/office/drawing/2014/main" id="{6A05C31E-4549-426A-BC52-042BDAD7B369}"/>
               </a:ext>
             </a:extLst>
           </p:cNvPr>
@@ -11199,7 +11399,7 @@
           <p:cNvPr id="6" name="">
             <a:extLst xmlns:a="http://schemas.openxmlformats.org/drawingml/2006/main">
               <a:ext uri="{FF2B5EF4-FFF2-40B4-BE49-F238E27FC236}">
-                <a16:creationId xmlns:a16="http://schemas.microsoft.com/office/drawing/2014/main" id="{C95161E0-79B3-4CC5-97AC-C6D5EE66FFAB}"/>
+                <a16:creationId xmlns:a16="http://schemas.microsoft.com/office/drawing/2014/main" id="{ACB92CDF-2F57-440B-86A2-9B89DB7D20E4}"/>
               </a:ext>
             </a:extLst>
           </p:cNvPr>
@@ -11256,7 +11456,7 @@
           <p:cNvPr id="7" name="">
             <a:extLst xmlns:a="http://schemas.openxmlformats.org/drawingml/2006/main">
               <a:ext uri="{FF2B5EF4-FFF2-40B4-BE49-F238E27FC236}">
-                <a16:creationId xmlns:a16="http://schemas.microsoft.com/office/drawing/2014/main" id="{908E1807-C672-4F13-A6C5-9878B0556829}"/>
+                <a16:creationId xmlns:a16="http://schemas.microsoft.com/office/drawing/2014/main" id="{FAE514A4-58B5-47A9-A4BB-29449D59293D}"/>
               </a:ext>
             </a:extLst>
           </p:cNvPr>
@@ -11288,7 +11488,7 @@
           <p:cNvPr id="8" name="">
             <a:extLst xmlns:a="http://schemas.openxmlformats.org/drawingml/2006/main">
               <a:ext uri="{FF2B5EF4-FFF2-40B4-BE49-F238E27FC236}">
-                <a16:creationId xmlns:a16="http://schemas.microsoft.com/office/drawing/2014/main" id="{B2980140-F9E3-4604-BEB2-867EB8BC59BA}"/>
+                <a16:creationId xmlns:a16="http://schemas.microsoft.com/office/drawing/2014/main" id="{6DB62F40-5BD1-44E7-A2E0-DA554D7D8520}"/>
               </a:ext>
             </a:extLst>
           </p:cNvPr>
@@ -11345,7 +11545,7 @@
           <p:cNvPr id="9" name="">
             <a:extLst xmlns:a="http://schemas.openxmlformats.org/drawingml/2006/main">
               <a:ext uri="{FF2B5EF4-FFF2-40B4-BE49-F238E27FC236}">
-                <a16:creationId xmlns:a16="http://schemas.microsoft.com/office/drawing/2014/main" id="{C1BE2C16-B836-4B79-8938-06327B1B8913}"/>
+                <a16:creationId xmlns:a16="http://schemas.microsoft.com/office/drawing/2014/main" id="{47B71463-AF19-4F24-9DD5-683FD2DDD19F}"/>
               </a:ext>
             </a:extLst>
           </p:cNvPr>
@@ -11406,7 +11606,7 @@
           <p:nvPr/>
         </p:nvPicPr>
         <p:blipFill>
-          <a:blip xmlns:r="http://schemas.openxmlformats.org/officeDocument/2006/relationships" xmlns:a="http://schemas.openxmlformats.org/drawingml/2006/main" r:embed="R69e1acb8a86d44d7"/>
+          <a:blip xmlns:r="http://schemas.openxmlformats.org/officeDocument/2006/relationships" xmlns:a="http://schemas.openxmlformats.org/drawingml/2006/main" r:embed="R213b231374174a41"/>
           <a:stretch xmlns:a="http://schemas.openxmlformats.org/drawingml/2006/main"/>
         </p:blipFill>
         <p:spPr>
@@ -11424,7 +11624,7 @@
           <p:cNvPr id="11" name="">
             <a:extLst xmlns:a="http://schemas.openxmlformats.org/drawingml/2006/main">
               <a:ext uri="{FF2B5EF4-FFF2-40B4-BE49-F238E27FC236}">
-                <a16:creationId xmlns:a16="http://schemas.microsoft.com/office/drawing/2014/main" id="{7CA7BF4D-3C7A-49CB-90A6-55AE6C45955D}"/>
+                <a16:creationId xmlns:a16="http://schemas.microsoft.com/office/drawing/2014/main" id="{DDC8036B-1618-4E3F-BC06-57D0BEC70F09}"/>
               </a:ext>
             </a:extLst>
           </p:cNvPr>
@@ -11481,7 +11681,7 @@
           <p:cNvPr id="12" name="">
             <a:extLst xmlns:a="http://schemas.openxmlformats.org/drawingml/2006/main">
               <a:ext uri="{FF2B5EF4-FFF2-40B4-BE49-F238E27FC236}">
-                <a16:creationId xmlns:a16="http://schemas.microsoft.com/office/drawing/2014/main" id="{DACD0BD4-6583-4F27-A423-5ACC8F1E37E5}"/>
+                <a16:creationId xmlns:a16="http://schemas.microsoft.com/office/drawing/2014/main" id="{1B934E02-16A1-4199-B884-32C7482CBF6D}"/>
               </a:ext>
             </a:extLst>
           </p:cNvPr>
@@ -11538,7 +11738,7 @@
           <p:cNvPr id="13" name="">
             <a:extLst xmlns:a="http://schemas.openxmlformats.org/drawingml/2006/main">
               <a:ext uri="{FF2B5EF4-FFF2-40B4-BE49-F238E27FC236}">
-                <a16:creationId xmlns:a16="http://schemas.microsoft.com/office/drawing/2014/main" id="{C06CABC2-39BD-4B28-BA26-082063FCE7D5}"/>
+                <a16:creationId xmlns:a16="http://schemas.microsoft.com/office/drawing/2014/main" id="{B818790B-A3A1-4A98-8FB3-6BB4F99E9F38}"/>
               </a:ext>
             </a:extLst>
           </p:cNvPr>
@@ -11570,7 +11770,7 @@
           <p:cNvPr id="14" name="">
             <a:extLst xmlns:a="http://schemas.openxmlformats.org/drawingml/2006/main">
               <a:ext uri="{FF2B5EF4-FFF2-40B4-BE49-F238E27FC236}">
-                <a16:creationId xmlns:a16="http://schemas.microsoft.com/office/drawing/2014/main" id="{888A0CF5-B553-4188-98EE-41DE81EE9327}"/>
+                <a16:creationId xmlns:a16="http://schemas.microsoft.com/office/drawing/2014/main" id="{5FAD5616-2C9E-4B53-B5C9-D745DEB287F4}"/>
               </a:ext>
             </a:extLst>
           </p:cNvPr>
@@ -11627,7 +11827,7 @@
           <p:cNvPr id="15" name="">
             <a:extLst xmlns:a="http://schemas.openxmlformats.org/drawingml/2006/main">
               <a:ext uri="{FF2B5EF4-FFF2-40B4-BE49-F238E27FC236}">
-                <a16:creationId xmlns:a16="http://schemas.microsoft.com/office/drawing/2014/main" id="{41F061D3-AF44-490A-ABC2-4899D076DA0F}"/>
+                <a16:creationId xmlns:a16="http://schemas.microsoft.com/office/drawing/2014/main" id="{9BAC80A8-880C-4436-AA47-56146E9FFC32}"/>
               </a:ext>
             </a:extLst>
           </p:cNvPr>
@@ -11682,7 +11882,7 @@
     </p:spTree>
     <p:extLst>
       <p:ext uri="{BB962C8B-B14F-4D97-AF65-F5344CB8AC3E}">
-        <p14:creationId xmlns:p14="http://schemas.microsoft.com/office/powerpoint/2010/main" val="1981959716"/>
+        <p14:creationId xmlns:p14="http://schemas.microsoft.com/office/powerpoint/2010/main" val="231862080"/>
       </p:ext>
     </p:extLst>
   </p:cSld>
@@ -11837,7 +12037,7 @@
           <p:cNvPr id="23" name="">
             <a:extLst xmlns:a="http://schemas.openxmlformats.org/drawingml/2006/main">
               <a:ext uri="{FF2B5EF4-FFF2-40B4-BE49-F238E27FC236}">
-                <a16:creationId xmlns:a16="http://schemas.microsoft.com/office/drawing/2014/main" id="{CA89D674-614A-4E6F-8761-C976C624407D}"/>
+                <a16:creationId xmlns:a16="http://schemas.microsoft.com/office/drawing/2014/main" id="{AF39DA1F-F60B-4A07-96E0-4E2125FDD8EB}"/>
               </a:ext>
             </a:extLst>
           </p:cNvPr>
@@ -11869,7 +12069,7 @@
           <p:cNvPr id="2" name="">
             <a:extLst xmlns:a="http://schemas.openxmlformats.org/drawingml/2006/main">
               <a:ext uri="{FF2B5EF4-FFF2-40B4-BE49-F238E27FC236}">
-                <a16:creationId xmlns:a16="http://schemas.microsoft.com/office/drawing/2014/main" id="{3E969839-6ECE-4010-B939-1D6201F7C910}"/>
+                <a16:creationId xmlns:a16="http://schemas.microsoft.com/office/drawing/2014/main" id="{060C5CEF-4B8A-4974-BD6E-52DD1017DD45}"/>
               </a:ext>
             </a:extLst>
           </p:cNvPr>
@@ -11926,7 +12126,7 @@
           <p:cNvPr id="3" name="">
             <a:extLst xmlns:a="http://schemas.openxmlformats.org/drawingml/2006/main">
               <a:ext uri="{FF2B5EF4-FFF2-40B4-BE49-F238E27FC236}">
-                <a16:creationId xmlns:a16="http://schemas.microsoft.com/office/drawing/2014/main" id="{D6C1D740-2054-4CC4-AB92-93397A418303}"/>
+                <a16:creationId xmlns:a16="http://schemas.microsoft.com/office/drawing/2014/main" id="{E0C2A444-E60B-4171-97D2-DCE50F4CCADE}"/>
               </a:ext>
             </a:extLst>
           </p:cNvPr>
@@ -11958,7 +12158,7 @@
           <p:cNvPr id="4" name="">
             <a:extLst xmlns:a="http://schemas.openxmlformats.org/drawingml/2006/main">
               <a:ext uri="{FF2B5EF4-FFF2-40B4-BE49-F238E27FC236}">
-                <a16:creationId xmlns:a16="http://schemas.microsoft.com/office/drawing/2014/main" id="{DEB10888-0969-418A-833E-7969BFB74CDA}"/>
+                <a16:creationId xmlns:a16="http://schemas.microsoft.com/office/drawing/2014/main" id="{DB2143E5-6564-4469-A8D4-884126EBF349}"/>
               </a:ext>
             </a:extLst>
           </p:cNvPr>
@@ -12015,7 +12215,7 @@
           <p:cNvPr id="5" name="">
             <a:extLst xmlns:a="http://schemas.openxmlformats.org/drawingml/2006/main">
               <a:ext uri="{FF2B5EF4-FFF2-40B4-BE49-F238E27FC236}">
-                <a16:creationId xmlns:a16="http://schemas.microsoft.com/office/drawing/2014/main" id="{8EB5E69D-CF17-46EE-B733-6F72088EDAE3}"/>
+                <a16:creationId xmlns:a16="http://schemas.microsoft.com/office/drawing/2014/main" id="{DA3C952A-49C7-49B0-A280-0C4EA605F18F}"/>
               </a:ext>
             </a:extLst>
           </p:cNvPr>
@@ -12072,7 +12272,7 @@
           <p:cNvPr id="6" name="">
             <a:extLst xmlns:a="http://schemas.openxmlformats.org/drawingml/2006/main">
               <a:ext uri="{FF2B5EF4-FFF2-40B4-BE49-F238E27FC236}">
-                <a16:creationId xmlns:a16="http://schemas.microsoft.com/office/drawing/2014/main" id="{A0AB2BAD-4BD0-4299-9437-484A84ECB4EC}"/>
+                <a16:creationId xmlns:a16="http://schemas.microsoft.com/office/drawing/2014/main" id="{8F2648A9-4E40-4F95-A4F2-4AC3AAF9500E}"/>
               </a:ext>
             </a:extLst>
           </p:cNvPr>
@@ -12129,7 +12329,7 @@
           <p:cNvPr id="7" name="">
             <a:extLst xmlns:a="http://schemas.openxmlformats.org/drawingml/2006/main">
               <a:ext uri="{FF2B5EF4-FFF2-40B4-BE49-F238E27FC236}">
-                <a16:creationId xmlns:a16="http://schemas.microsoft.com/office/drawing/2014/main" id="{3ED85299-244D-486B-845A-C3AE74A5BC0F}"/>
+                <a16:creationId xmlns:a16="http://schemas.microsoft.com/office/drawing/2014/main" id="{8096A304-6167-4AB4-B57F-8DE7B5DBD1C1}"/>
               </a:ext>
             </a:extLst>
           </p:cNvPr>
@@ -12161,7 +12361,7 @@
           <p:cNvPr id="8" name="">
             <a:extLst xmlns:a="http://schemas.openxmlformats.org/drawingml/2006/main">
               <a:ext uri="{FF2B5EF4-FFF2-40B4-BE49-F238E27FC236}">
-                <a16:creationId xmlns:a16="http://schemas.microsoft.com/office/drawing/2014/main" id="{902DBD74-AA36-448F-86C2-B87E0F8432E7}"/>
+                <a16:creationId xmlns:a16="http://schemas.microsoft.com/office/drawing/2014/main" id="{FC90AEDB-9740-44D0-B397-DC6A101B46F1}"/>
               </a:ext>
             </a:extLst>
           </p:cNvPr>
@@ -12218,7 +12418,7 @@
           <p:cNvPr id="9" name="">
             <a:extLst xmlns:a="http://schemas.openxmlformats.org/drawingml/2006/main">
               <a:ext uri="{FF2B5EF4-FFF2-40B4-BE49-F238E27FC236}">
-                <a16:creationId xmlns:a16="http://schemas.microsoft.com/office/drawing/2014/main" id="{4F450EE6-FA48-4BA2-991B-45D2211E4199}"/>
+                <a16:creationId xmlns:a16="http://schemas.microsoft.com/office/drawing/2014/main" id="{5591BBD6-E0F3-45A9-94BC-90F4218D9ADC}"/>
               </a:ext>
             </a:extLst>
           </p:cNvPr>
@@ -12275,7 +12475,7 @@
           <p:cNvPr id="10" name="">
             <a:extLst xmlns:a="http://schemas.openxmlformats.org/drawingml/2006/main">
               <a:ext uri="{FF2B5EF4-FFF2-40B4-BE49-F238E27FC236}">
-                <a16:creationId xmlns:a16="http://schemas.microsoft.com/office/drawing/2014/main" id="{6EDE5A67-CBF2-4F1B-AF76-1CE8267041B7}"/>
+                <a16:creationId xmlns:a16="http://schemas.microsoft.com/office/drawing/2014/main" id="{E17DEDB5-BC8E-44E4-A930-91D5C19FEF59}"/>
               </a:ext>
             </a:extLst>
           </p:cNvPr>
@@ -12309,7 +12509,7 @@
           <p:cNvPr id="11" name="">
             <a:extLst xmlns:a="http://schemas.openxmlformats.org/drawingml/2006/main">
               <a:ext uri="{FF2B5EF4-FFF2-40B4-BE49-F238E27FC236}">
-                <a16:creationId xmlns:a16="http://schemas.microsoft.com/office/drawing/2014/main" id="{E4FA2C70-0233-4030-B143-40B4D716FC8E}"/>
+                <a16:creationId xmlns:a16="http://schemas.microsoft.com/office/drawing/2014/main" id="{7F039503-D398-4A4B-B5BE-65B28AEE8A24}"/>
               </a:ext>
             </a:extLst>
           </p:cNvPr>
@@ -12341,7 +12541,7 @@
           <p:cNvPr id="12" name="">
             <a:extLst xmlns:a="http://schemas.openxmlformats.org/drawingml/2006/main">
               <a:ext uri="{FF2B5EF4-FFF2-40B4-BE49-F238E27FC236}">
-                <a16:creationId xmlns:a16="http://schemas.microsoft.com/office/drawing/2014/main" id="{6D1C4E20-E564-44E0-BD32-DE4147714840}"/>
+                <a16:creationId xmlns:a16="http://schemas.microsoft.com/office/drawing/2014/main" id="{9227A291-2E38-4AB9-A0A9-4C469E3C95B1}"/>
               </a:ext>
             </a:extLst>
           </p:cNvPr>
@@ -12398,7 +12598,7 @@
           <p:cNvPr id="13" name="">
             <a:extLst xmlns:a="http://schemas.openxmlformats.org/drawingml/2006/main">
               <a:ext uri="{FF2B5EF4-FFF2-40B4-BE49-F238E27FC236}">
-                <a16:creationId xmlns:a16="http://schemas.microsoft.com/office/drawing/2014/main" id="{5040CF92-2491-4AFE-AE48-E4C24265A8A1}"/>
+                <a16:creationId xmlns:a16="http://schemas.microsoft.com/office/drawing/2014/main" id="{6D924707-D115-4A4C-96C9-5F953E91F09C}"/>
               </a:ext>
             </a:extLst>
           </p:cNvPr>
@@ -12455,7 +12655,7 @@
           <p:cNvPr id="14" name="">
             <a:extLst xmlns:a="http://schemas.openxmlformats.org/drawingml/2006/main">
               <a:ext uri="{FF2B5EF4-FFF2-40B4-BE49-F238E27FC236}">
-                <a16:creationId xmlns:a16="http://schemas.microsoft.com/office/drawing/2014/main" id="{427D9F5A-CA25-41B3-92DC-1D4ECEC07E16}"/>
+                <a16:creationId xmlns:a16="http://schemas.microsoft.com/office/drawing/2014/main" id="{CF14C947-1C88-43D6-B5A9-EE91C18985BB}"/>
               </a:ext>
             </a:extLst>
           </p:cNvPr>
@@ -12489,7 +12689,7 @@
           <p:cNvPr id="15" name="">
             <a:extLst xmlns:a="http://schemas.openxmlformats.org/drawingml/2006/main">
               <a:ext uri="{FF2B5EF4-FFF2-40B4-BE49-F238E27FC236}">
-                <a16:creationId xmlns:a16="http://schemas.microsoft.com/office/drawing/2014/main" id="{AAA4A153-3A22-4500-A4A0-32884E8D3E0E}"/>
+                <a16:creationId xmlns:a16="http://schemas.microsoft.com/office/drawing/2014/main" id="{EDFA2350-B1F7-47B9-AC18-802D186D8F04}"/>
               </a:ext>
             </a:extLst>
           </p:cNvPr>
@@ -12521,7 +12721,7 @@
           <p:cNvPr id="16" name="">
             <a:extLst xmlns:a="http://schemas.openxmlformats.org/drawingml/2006/main">
               <a:ext uri="{FF2B5EF4-FFF2-40B4-BE49-F238E27FC236}">
-                <a16:creationId xmlns:a16="http://schemas.microsoft.com/office/drawing/2014/main" id="{6D98D2BF-40F3-4BDE-99F3-4B41C182973F}"/>
+                <a16:creationId xmlns:a16="http://schemas.microsoft.com/office/drawing/2014/main" id="{5B04B759-C7F0-4F36-837E-855D3F0DA397}"/>
               </a:ext>
             </a:extLst>
           </p:cNvPr>
@@ -12578,7 +12778,7 @@
           <p:cNvPr id="17" name="">
             <a:extLst xmlns:a="http://schemas.openxmlformats.org/drawingml/2006/main">
               <a:ext uri="{FF2B5EF4-FFF2-40B4-BE49-F238E27FC236}">
-                <a16:creationId xmlns:a16="http://schemas.microsoft.com/office/drawing/2014/main" id="{1D967D51-2E84-4E85-A53D-500C36FFB6D8}"/>
+                <a16:creationId xmlns:a16="http://schemas.microsoft.com/office/drawing/2014/main" id="{ECDFAB20-4B3C-4D99-BAD6-A822B17F7F0D}"/>
               </a:ext>
             </a:extLst>
           </p:cNvPr>
@@ -12635,7 +12835,7 @@
           <p:cNvPr id="18" name="">
             <a:extLst xmlns:a="http://schemas.openxmlformats.org/drawingml/2006/main">
               <a:ext uri="{FF2B5EF4-FFF2-40B4-BE49-F238E27FC236}">
-                <a16:creationId xmlns:a16="http://schemas.microsoft.com/office/drawing/2014/main" id="{8C7064BC-8E75-4D6E-A5C8-4238E2680B1F}"/>
+                <a16:creationId xmlns:a16="http://schemas.microsoft.com/office/drawing/2014/main" id="{EB87CA9D-44DC-4015-8DD1-1C3F055AFF4A}"/>
               </a:ext>
             </a:extLst>
           </p:cNvPr>
@@ -12669,7 +12869,7 @@
           <p:cNvPr id="19" name="">
             <a:extLst xmlns:a="http://schemas.openxmlformats.org/drawingml/2006/main">
               <a:ext uri="{FF2B5EF4-FFF2-40B4-BE49-F238E27FC236}">
-                <a16:creationId xmlns:a16="http://schemas.microsoft.com/office/drawing/2014/main" id="{7B08571E-319F-440D-879B-F0084E197306}"/>
+                <a16:creationId xmlns:a16="http://schemas.microsoft.com/office/drawing/2014/main" id="{B94BF1DB-E6BB-4EA3-AFC9-494C4DE85E66}"/>
               </a:ext>
             </a:extLst>
           </p:cNvPr>
@@ -12701,7 +12901,7 @@
           <p:cNvPr id="20" name="">
             <a:extLst xmlns:a="http://schemas.openxmlformats.org/drawingml/2006/main">
               <a:ext uri="{FF2B5EF4-FFF2-40B4-BE49-F238E27FC236}">
-                <a16:creationId xmlns:a16="http://schemas.microsoft.com/office/drawing/2014/main" id="{B7253027-255D-4DD0-A3FD-94677F6FDB8B}"/>
+                <a16:creationId xmlns:a16="http://schemas.microsoft.com/office/drawing/2014/main" id="{74A69F8E-BD00-4FA6-B427-F831B1C78C2F}"/>
               </a:ext>
             </a:extLst>
           </p:cNvPr>
@@ -12758,7 +12958,7 @@
           <p:cNvPr id="21" name="">
             <a:extLst xmlns:a="http://schemas.openxmlformats.org/drawingml/2006/main">
               <a:ext uri="{FF2B5EF4-FFF2-40B4-BE49-F238E27FC236}">
-                <a16:creationId xmlns:a16="http://schemas.microsoft.com/office/drawing/2014/main" id="{0A5707B9-D730-4991-870D-E600075E8432}"/>
+                <a16:creationId xmlns:a16="http://schemas.microsoft.com/office/drawing/2014/main" id="{456F9C94-BF3E-4CD5-B006-6CF8669FE84F}"/>
               </a:ext>
             </a:extLst>
           </p:cNvPr>
@@ -12815,7 +13015,7 @@
           <p:cNvPr id="22" name="">
             <a:extLst xmlns:a="http://schemas.openxmlformats.org/drawingml/2006/main">
               <a:ext uri="{FF2B5EF4-FFF2-40B4-BE49-F238E27FC236}">
-                <a16:creationId xmlns:a16="http://schemas.microsoft.com/office/drawing/2014/main" id="{EA312EFA-C308-4897-B54E-9AF9B2AAF313}"/>
+                <a16:creationId xmlns:a16="http://schemas.microsoft.com/office/drawing/2014/main" id="{98054959-F15C-4922-B793-756787F751E1}"/>
               </a:ext>
             </a:extLst>
           </p:cNvPr>
@@ -12870,7 +13070,7 @@
     </p:spTree>
     <p:extLst>
       <p:ext uri="{BB962C8B-B14F-4D97-AF65-F5344CB8AC3E}">
-        <p14:creationId xmlns:p14="http://schemas.microsoft.com/office/powerpoint/2010/main" val="1284398084"/>
+        <p14:creationId xmlns:p14="http://schemas.microsoft.com/office/powerpoint/2010/main" val="1427958728"/>
       </p:ext>
     </p:extLst>
   </p:cSld>
@@ -13071,7 +13271,7 @@
           <p:cNvPr id="22" name="">
             <a:extLst xmlns:a="http://schemas.openxmlformats.org/drawingml/2006/main">
               <a:ext uri="{FF2B5EF4-FFF2-40B4-BE49-F238E27FC236}">
-                <a16:creationId xmlns:a16="http://schemas.microsoft.com/office/drawing/2014/main" id="{9F4F81EC-8B8D-47D3-9FFD-7C713C6D53C7}"/>
+                <a16:creationId xmlns:a16="http://schemas.microsoft.com/office/drawing/2014/main" id="{61FDAFA9-7916-41FD-8F26-E70A35E617D4}"/>
               </a:ext>
             </a:extLst>
           </p:cNvPr>
@@ -13103,7 +13303,7 @@
           <p:cNvPr id="2" name="">
             <a:extLst xmlns:a="http://schemas.openxmlformats.org/drawingml/2006/main">
               <a:ext uri="{FF2B5EF4-FFF2-40B4-BE49-F238E27FC236}">
-                <a16:creationId xmlns:a16="http://schemas.microsoft.com/office/drawing/2014/main" id="{3B1B0106-80B2-475B-BC2B-EA92AE4FE9C6}"/>
+                <a16:creationId xmlns:a16="http://schemas.microsoft.com/office/drawing/2014/main" id="{F4ABAAE7-852D-4D5B-8DE6-36EB2EC31B08}"/>
               </a:ext>
             </a:extLst>
           </p:cNvPr>
@@ -13160,7 +13360,7 @@
           <p:cNvPr id="3" name="">
             <a:extLst xmlns:a="http://schemas.openxmlformats.org/drawingml/2006/main">
               <a:ext uri="{FF2B5EF4-FFF2-40B4-BE49-F238E27FC236}">
-                <a16:creationId xmlns:a16="http://schemas.microsoft.com/office/drawing/2014/main" id="{0A5F4FB7-1339-450B-A8FA-63A8EE0F5DF8}"/>
+                <a16:creationId xmlns:a16="http://schemas.microsoft.com/office/drawing/2014/main" id="{D9B01D56-A69F-4A13-8680-50888DAC2613}"/>
               </a:ext>
             </a:extLst>
           </p:cNvPr>
@@ -13192,7 +13392,7 @@
           <p:cNvPr id="4" name="">
             <a:extLst xmlns:a="http://schemas.openxmlformats.org/drawingml/2006/main">
               <a:ext uri="{FF2B5EF4-FFF2-40B4-BE49-F238E27FC236}">
-                <a16:creationId xmlns:a16="http://schemas.microsoft.com/office/drawing/2014/main" id="{AE7FA6B0-54F0-4BAA-823F-2E07F486802B}"/>
+                <a16:creationId xmlns:a16="http://schemas.microsoft.com/office/drawing/2014/main" id="{F06E0842-0BED-4B89-B11E-FF9C4778BEDE}"/>
               </a:ext>
             </a:extLst>
           </p:cNvPr>
@@ -13249,7 +13449,7 @@
           <p:cNvPr id="5" name="">
             <a:extLst xmlns:a="http://schemas.openxmlformats.org/drawingml/2006/main">
               <a:ext uri="{FF2B5EF4-FFF2-40B4-BE49-F238E27FC236}">
-                <a16:creationId xmlns:a16="http://schemas.microsoft.com/office/drawing/2014/main" id="{0F0C7DCC-BFB0-4551-99F9-8F4352284E61}"/>
+                <a16:creationId xmlns:a16="http://schemas.microsoft.com/office/drawing/2014/main" id="{2A807F7A-4868-4857-81F2-741529A787D1}"/>
               </a:ext>
             </a:extLst>
           </p:cNvPr>
@@ -13306,7 +13506,7 @@
           <p:cNvPr id="6" name="">
             <a:extLst xmlns:a="http://schemas.openxmlformats.org/drawingml/2006/main">
               <a:ext uri="{FF2B5EF4-FFF2-40B4-BE49-F238E27FC236}">
-                <a16:creationId xmlns:a16="http://schemas.microsoft.com/office/drawing/2014/main" id="{53119A5F-9169-4C80-BE75-D55FD40B6AF6}"/>
+                <a16:creationId xmlns:a16="http://schemas.microsoft.com/office/drawing/2014/main" id="{784C27F9-F893-424F-AB90-33A02C17C1FE}"/>
               </a:ext>
             </a:extLst>
           </p:cNvPr>
@@ -13363,7 +13563,7 @@
           <p:cNvPr id="7" name="">
             <a:extLst xmlns:a="http://schemas.openxmlformats.org/drawingml/2006/main">
               <a:ext uri="{FF2B5EF4-FFF2-40B4-BE49-F238E27FC236}">
-                <a16:creationId xmlns:a16="http://schemas.microsoft.com/office/drawing/2014/main" id="{44BE5E96-2A83-422D-95A6-1F08965C39E5}"/>
+                <a16:creationId xmlns:a16="http://schemas.microsoft.com/office/drawing/2014/main" id="{BB5A1151-C308-4642-B4E1-48826620B115}"/>
               </a:ext>
             </a:extLst>
           </p:cNvPr>
@@ -13395,7 +13595,7 @@
           <p:cNvPr id="8" name="">
             <a:extLst xmlns:a="http://schemas.openxmlformats.org/drawingml/2006/main">
               <a:ext uri="{FF2B5EF4-FFF2-40B4-BE49-F238E27FC236}">
-                <a16:creationId xmlns:a16="http://schemas.microsoft.com/office/drawing/2014/main" id="{AB8CF5AA-8F3A-47CC-BF71-AC640A861C97}"/>
+                <a16:creationId xmlns:a16="http://schemas.microsoft.com/office/drawing/2014/main" id="{B430502A-05F5-4EE7-9297-42B31618852C}"/>
               </a:ext>
             </a:extLst>
           </p:cNvPr>
@@ -13452,7 +13652,7 @@
           <p:cNvPr id="9" name="">
             <a:extLst xmlns:a="http://schemas.openxmlformats.org/drawingml/2006/main">
               <a:ext uri="{FF2B5EF4-FFF2-40B4-BE49-F238E27FC236}">
-                <a16:creationId xmlns:a16="http://schemas.microsoft.com/office/drawing/2014/main" id="{0E902C66-D841-49C0-B579-2B2C50C0B321}"/>
+                <a16:creationId xmlns:a16="http://schemas.microsoft.com/office/drawing/2014/main" id="{64EF47AA-F59D-4E8E-BA5B-077FA3FE22F6}"/>
               </a:ext>
             </a:extLst>
           </p:cNvPr>
@@ -13509,7 +13709,7 @@
           <p:cNvPr id="10" name="">
             <a:extLst xmlns:a="http://schemas.openxmlformats.org/drawingml/2006/main">
               <a:ext uri="{FF2B5EF4-FFF2-40B4-BE49-F238E27FC236}">
-                <a16:creationId xmlns:a16="http://schemas.microsoft.com/office/drawing/2014/main" id="{3F2C5294-EEB5-42A3-8A1D-82847517C5DB}"/>
+                <a16:creationId xmlns:a16="http://schemas.microsoft.com/office/drawing/2014/main" id="{4C481F65-19F5-4D93-AAB1-63A064FC1E02}"/>
               </a:ext>
             </a:extLst>
           </p:cNvPr>
@@ -13543,7 +13743,7 @@
           <p:cNvPr id="11" name="">
             <a:extLst xmlns:a="http://schemas.openxmlformats.org/drawingml/2006/main">
               <a:ext uri="{FF2B5EF4-FFF2-40B4-BE49-F238E27FC236}">
-                <a16:creationId xmlns:a16="http://schemas.microsoft.com/office/drawing/2014/main" id="{D65905FC-8208-4D89-BC60-F1FD69775AF9}"/>
+                <a16:creationId xmlns:a16="http://schemas.microsoft.com/office/drawing/2014/main" id="{AE318650-CF38-435E-830B-2D4D0870F9E0}"/>
               </a:ext>
             </a:extLst>
           </p:cNvPr>
@@ -13575,7 +13775,7 @@
           <p:cNvPr id="12" name="">
             <a:extLst xmlns:a="http://schemas.openxmlformats.org/drawingml/2006/main">
               <a:ext uri="{FF2B5EF4-FFF2-40B4-BE49-F238E27FC236}">
-                <a16:creationId xmlns:a16="http://schemas.microsoft.com/office/drawing/2014/main" id="{857D1D91-165A-4F22-97AA-79737D61512E}"/>
+                <a16:creationId xmlns:a16="http://schemas.microsoft.com/office/drawing/2014/main" id="{CC99DA57-3276-47C4-826E-23413E5B4835}"/>
               </a:ext>
             </a:extLst>
           </p:cNvPr>
@@ -13632,7 +13832,7 @@
           <p:cNvPr id="13" name="">
             <a:extLst xmlns:a="http://schemas.openxmlformats.org/drawingml/2006/main">
               <a:ext uri="{FF2B5EF4-FFF2-40B4-BE49-F238E27FC236}">
-                <a16:creationId xmlns:a16="http://schemas.microsoft.com/office/drawing/2014/main" id="{70C1F61D-4F34-4354-BF73-3AC74F2C456C}"/>
+                <a16:creationId xmlns:a16="http://schemas.microsoft.com/office/drawing/2014/main" id="{2EE621C5-D97F-4CE7-8172-150FBE0F0C09}"/>
               </a:ext>
             </a:extLst>
           </p:cNvPr>
@@ -13689,7 +13889,7 @@
           <p:cNvPr id="14" name="">
             <a:extLst xmlns:a="http://schemas.openxmlformats.org/drawingml/2006/main">
               <a:ext uri="{FF2B5EF4-FFF2-40B4-BE49-F238E27FC236}">
-                <a16:creationId xmlns:a16="http://schemas.microsoft.com/office/drawing/2014/main" id="{90945F92-D4B7-4052-A4CD-E18197B964AE}"/>
+                <a16:creationId xmlns:a16="http://schemas.microsoft.com/office/drawing/2014/main" id="{BB01D97D-DC1D-46FF-B2F1-4AD722EC09FD}"/>
               </a:ext>
             </a:extLst>
           </p:cNvPr>
@@ -13723,7 +13923,7 @@
           <p:cNvPr id="15" name="">
             <a:extLst xmlns:a="http://schemas.openxmlformats.org/drawingml/2006/main">
               <a:ext uri="{FF2B5EF4-FFF2-40B4-BE49-F238E27FC236}">
-                <a16:creationId xmlns:a16="http://schemas.microsoft.com/office/drawing/2014/main" id="{1430A112-A496-4009-8C5C-E0E6A1887D71}"/>
+                <a16:creationId xmlns:a16="http://schemas.microsoft.com/office/drawing/2014/main" id="{4F169CF1-FF3B-4A00-BC47-C5D668D73048}"/>
               </a:ext>
             </a:extLst>
           </p:cNvPr>
@@ -13755,7 +13955,7 @@
           <p:cNvPr id="16" name="">
             <a:extLst xmlns:a="http://schemas.openxmlformats.org/drawingml/2006/main">
               <a:ext uri="{FF2B5EF4-FFF2-40B4-BE49-F238E27FC236}">
-                <a16:creationId xmlns:a16="http://schemas.microsoft.com/office/drawing/2014/main" id="{63A14AE9-026C-424A-BD18-232B4521CA2B}"/>
+                <a16:creationId xmlns:a16="http://schemas.microsoft.com/office/drawing/2014/main" id="{89E79B68-B1A6-433B-BEC5-DADF6DD51632}"/>
               </a:ext>
             </a:extLst>
           </p:cNvPr>
@@ -13812,7 +14012,7 @@
           <p:cNvPr id="17" name="">
             <a:extLst xmlns:a="http://schemas.openxmlformats.org/drawingml/2006/main">
               <a:ext uri="{FF2B5EF4-FFF2-40B4-BE49-F238E27FC236}">
-                <a16:creationId xmlns:a16="http://schemas.microsoft.com/office/drawing/2014/main" id="{66A8D1F6-AC37-4190-97A3-46FB78182231}"/>
+                <a16:creationId xmlns:a16="http://schemas.microsoft.com/office/drawing/2014/main" id="{8484DB66-61EC-48C1-AB17-908FC1027412}"/>
               </a:ext>
             </a:extLst>
           </p:cNvPr>
@@ -13869,7 +14069,7 @@
           <p:cNvPr id="18" name="">
             <a:extLst xmlns:a="http://schemas.openxmlformats.org/drawingml/2006/main">
               <a:ext uri="{FF2B5EF4-FFF2-40B4-BE49-F238E27FC236}">
-                <a16:creationId xmlns:a16="http://schemas.microsoft.com/office/drawing/2014/main" id="{A737333C-59FB-4E34-B7E4-5E8D6146136D}"/>
+                <a16:creationId xmlns:a16="http://schemas.microsoft.com/office/drawing/2014/main" id="{824C5255-5E8A-4016-B6EB-C7CC735C5B87}"/>
               </a:ext>
             </a:extLst>
           </p:cNvPr>
@@ -13903,7 +14103,7 @@
           <p:cNvPr id="19" name="">
             <a:extLst xmlns:a="http://schemas.openxmlformats.org/drawingml/2006/main">
               <a:ext uri="{FF2B5EF4-FFF2-40B4-BE49-F238E27FC236}">
-                <a16:creationId xmlns:a16="http://schemas.microsoft.com/office/drawing/2014/main" id="{E3755D88-B9E4-4587-937C-315F05E072C4}"/>
+                <a16:creationId xmlns:a16="http://schemas.microsoft.com/office/drawing/2014/main" id="{E100B682-FE8D-4106-B31F-7E72565729D7}"/>
               </a:ext>
             </a:extLst>
           </p:cNvPr>
@@ -13935,7 +14135,7 @@
           <p:cNvPr id="20" name="">
             <a:extLst xmlns:a="http://schemas.openxmlformats.org/drawingml/2006/main">
               <a:ext uri="{FF2B5EF4-FFF2-40B4-BE49-F238E27FC236}">
-                <a16:creationId xmlns:a16="http://schemas.microsoft.com/office/drawing/2014/main" id="{9FA89CD1-9D50-4563-A9E1-45E8E9D63D17}"/>
+                <a16:creationId xmlns:a16="http://schemas.microsoft.com/office/drawing/2014/main" id="{DDEB964B-9F33-47BA-A113-F2E310049936}"/>
               </a:ext>
             </a:extLst>
           </p:cNvPr>
@@ -13992,7 +14192,7 @@
           <p:cNvPr id="21" name="">
             <a:extLst xmlns:a="http://schemas.openxmlformats.org/drawingml/2006/main">
               <a:ext uri="{FF2B5EF4-FFF2-40B4-BE49-F238E27FC236}">
-                <a16:creationId xmlns:a16="http://schemas.microsoft.com/office/drawing/2014/main" id="{F08311B7-2564-460B-8AA5-6BCBB550667E}"/>
+                <a16:creationId xmlns:a16="http://schemas.microsoft.com/office/drawing/2014/main" id="{B2056EDB-C581-43D9-8407-3B65CF714F71}"/>
               </a:ext>
             </a:extLst>
           </p:cNvPr>
@@ -14047,7 +14247,7 @@
     </p:spTree>
     <p:extLst>
       <p:ext uri="{BB962C8B-B14F-4D97-AF65-F5344CB8AC3E}">
-        <p14:creationId xmlns:p14="http://schemas.microsoft.com/office/powerpoint/2010/main" val="71919743"/>
+        <p14:creationId xmlns:p14="http://schemas.microsoft.com/office/powerpoint/2010/main" val="289731803"/>
       </p:ext>
     </p:extLst>
   </p:cSld>
